--- a/Topic_B/Exam_Practice/TB-L07_Speaking_Workshop_Clothes_Accessories_and_Shopping.pptx
+++ b/Topic_B/Exam_Practice/TB-L07_Speaking_Workshop_Clothes_Accessories_and_Shopping.pptx
@@ -615,7 +615,11 @@
           <a:lstStyle/>
           <a:p>
             <a:r>
-              <a:rPr lang="en-US" dirty="0"/>
+              <a:rPr lang="ar-SA" dirty="0">
+                <a:latin typeface="Amiri" pitchFamily="2" charset="-78"/>
+                <a:ea typeface="Amiri" pitchFamily="2" charset="-78"/>
+                <a:cs typeface="Amiri" pitchFamily="2" charset="-78"/>
+              </a:rPr>
               <a:t>ROLE PLAY C (Develop) — returning an item.
 SET-UP IN THE BREAKOUT ROOM: A = examiner (reads the left column ONLY — the questions, in order), B = candidate (sees the task column; Core may use the help column), C = observer (ticks the feedback checklist). 1 minute preparation, about 3 minutes speaking, 1 minute feedback, then rotate.
 Task ! is the unexpected question: in the exam the candidate has not seen it — the examiner should read it without warning.
@@ -707,7 +711,11 @@
           <a:lstStyle/>
           <a:p>
             <a:r>
-              <a:rPr lang="en-US" dirty="0"/>
+              <a:rPr lang="ar-SA" dirty="0">
+                <a:latin typeface="Amiri" pitchFamily="2" charset="-78"/>
+                <a:ea typeface="Amiri" pitchFamily="2" charset="-78"/>
+                <a:cs typeface="Amiri" pitchFamily="2" charset="-78"/>
+              </a:rPr>
               <a:t>ROLE PLAY D (Stretch) — a radio debate.
 SET-UP IN THE BREAKOUT ROOM: A = examiner (reads the left column ONLY — the questions, in order), B = candidate (sees the task column; Core may use the help column), C = observer (ticks the feedback checklist). 1 minute preparation, about 3 minutes speaking, 1 minute feedback, then rotate.
 Task ! is the unexpected question: in the exam the candidate has not seen it — the examiner should read it without warning.
@@ -1243,7 +1251,11 @@
           <a:lstStyle/>
           <a:p>
             <a:r>
-              <a:rPr lang="en-US" dirty="0"/>
+              <a:rPr lang="ar-SA" dirty="0">
+                <a:latin typeface="Amiri" pitchFamily="2" charset="-78"/>
+                <a:ea typeface="Amiri" pitchFamily="2" charset="-78"/>
+                <a:cs typeface="Amiri" pitchFamily="2" charset="-78"/>
+              </a:rPr>
               <a:t>TOPIC CONVERSATION — Core. Examiner asks the questions in order and may add “لِمَاذَا؟ / هَلْ يُمْكِنُ أَنْ تَشْرَحَ أَكْثَرَ؟” to push for more. Candidate aims for one full sentence per question.
 </a:t>
             </a:r>
@@ -1332,7 +1344,11 @@
           <a:lstStyle/>
           <a:p>
             <a:r>
-              <a:rPr lang="en-US" dirty="0"/>
+              <a:rPr lang="ar-SA" dirty="0">
+                <a:latin typeface="Amiri" pitchFamily="2" charset="-78"/>
+                <a:ea typeface="Amiri" pitchFamily="2" charset="-78"/>
+                <a:cs typeface="Amiri" pitchFamily="2" charset="-78"/>
+              </a:rPr>
               <a:t>TOPIC CONVERSATION — Develop. Examiner asks the questions in order and may add “لِمَاذَا؟ / هَلْ يُمْكِنُ أَنْ تَشْرَحَ أَكْثَرَ؟” to push for more. Candidate aims for two or three sentences, with a comparison or a past purchase.
 </a:t>
             </a:r>
@@ -1421,7 +1437,11 @@
           <a:lstStyle/>
           <a:p>
             <a:r>
-              <a:rPr lang="en-US" dirty="0"/>
+              <a:rPr lang="ar-SA" dirty="0">
+                <a:latin typeface="Amiri" pitchFamily="2" charset="-78"/>
+                <a:ea typeface="Amiri" pitchFamily="2" charset="-78"/>
+                <a:cs typeface="Amiri" pitchFamily="2" charset="-78"/>
+              </a:rPr>
               <a:t>TOPIC CONVERSATION — Stretch. Examiner asks the questions in order and may add “لِمَاذَا؟ / هَلْ يُمْكِنُ أَنْ تَشْرَحَ أَكْثَرَ؟” to push for more. Candidate aims for a developed answer: opinion, comparison, concession and a conditional.
 </a:t>
             </a:r>
@@ -1510,7 +1530,11 @@
           <a:lstStyle/>
           <a:p>
             <a:r>
-              <a:rPr lang="en-US" dirty="0"/>
+              <a:rPr lang="ar-SA" dirty="0">
+                <a:latin typeface="Amiri" pitchFamily="2" charset="-78"/>
+                <a:ea typeface="Amiri" pitchFamily="2" charset="-78"/>
+                <a:cs typeface="Amiri" pitchFamily="2" charset="-78"/>
+              </a:rPr>
               <a:t>WELCOME (1 min) — while students join.
 • Greet each student by name as they arrive: السَّلَامُ عَلَيْكُمْ. Take the register (Pastoral Tracker: attendance 0/1).
 • 2-MINUTE CHECK-IN (SEND training): a private chat to any student who seemed unsettled last lesson — “Are you okay today? 👍 / 👎”.
@@ -2224,7 +2248,11 @@
           <a:lstStyle/>
           <a:p>
             <a:r>
-              <a:rPr lang="en-US" dirty="0"/>
+              <a:rPr lang="ar-SA" dirty="0">
+                <a:latin typeface="Amiri" pitchFamily="2" charset="-78"/>
+                <a:ea typeface="Amiri" pitchFamily="2" charset="-78"/>
+                <a:cs typeface="Amiri" pitchFamily="2" charset="-78"/>
+              </a:rPr>
               <a:t>TEACH (3 min). Role play = precise and complete; conversation = develop. Choral repetition of the repair phrases. To a girl: تُعِيدِي.</a:t>
             </a:r>
             <a:endParaRPr lang="en-US" dirty="0"/>
@@ -2312,7 +2340,11 @@
           <a:lstStyle/>
           <a:p>
             <a:r>
-              <a:rPr lang="en-US" dirty="0"/>
+              <a:rPr lang="ar-SA" dirty="0">
+                <a:latin typeface="Amiri" pitchFamily="2" charset="-78"/>
+                <a:ea typeface="Amiri" pitchFamily="2" charset="-78"/>
+                <a:cs typeface="Amiri" pitchFamily="2" charset="-78"/>
+              </a:rPr>
               <a:t>LANGUAGE BANK (2 min) — broken plurals: قُمْصَانٌ · فَسَاتِينُ · أَحْذِيَةٌ · مَعَاطِفُ. Gender drives agreement: قَمِيصٌ أَبْيَضُ (m.) · تَنُّورَةٌ سَوْدَاءُ (f.).</a:t>
             </a:r>
             <a:endParaRPr lang="en-US" dirty="0"/>
@@ -2400,7 +2432,11 @@
           <a:lstStyle/>
           <a:p>
             <a:r>
-              <a:rPr lang="en-US" dirty="0"/>
+              <a:rPr lang="ar-SA" dirty="0">
+                <a:latin typeface="Amiri" pitchFamily="2" charset="-78"/>
+                <a:ea typeface="Amiri" pitchFamily="2" charset="-78"/>
+                <a:cs typeface="Amiri" pitchFamily="2" charset="-78"/>
+              </a:rPr>
               <a:t>LANGUAGE BANK (2 min) — object pronouns: أُجَرِّبُهُ (the shirt) · أُجَرِّبُهَا (the dress) · سَآخُذُهُ. Comparatives do not change for gender: هٰذِهِ أَرْخَصُ مِنْ تِلْكَ. Prices 11–99 take a singular accusative noun: خَمْسَةٌ وَعِشْرُونَ دِينَارًا.</a:t>
             </a:r>
             <a:endParaRPr lang="en-US" dirty="0"/>
@@ -2576,7 +2612,11 @@
           <a:lstStyle/>
           <a:p>
             <a:r>
-              <a:rPr lang="en-US" dirty="0"/>
+              <a:rPr lang="ar-SA" dirty="0">
+                <a:latin typeface="Amiri" pitchFamily="2" charset="-78"/>
+                <a:ea typeface="Amiri" pitchFamily="2" charset="-78"/>
+                <a:cs typeface="Amiri" pitchFamily="2" charset="-78"/>
+              </a:rPr>
               <a:t>ROLE PLAY A (Core) — in a clothes shop.
 SET-UP IN THE BREAKOUT ROOM: A = examiner (reads the left column ONLY — the questions, in order), B = candidate (sees the task column; Core may use the help column), C = observer (ticks the feedback checklist). 1 minute preparation, about 3 minutes speaking, 1 minute feedback, then rotate.
 Task ! is the unexpected question: in the exam the candidate has not seen it — the examiner should read it without warning.
@@ -2668,7 +2708,11 @@
           <a:lstStyle/>
           <a:p>
             <a:r>
-              <a:rPr lang="en-US" dirty="0"/>
+              <a:rPr lang="ar-SA" dirty="0">
+                <a:latin typeface="Amiri" pitchFamily="2" charset="-78"/>
+                <a:ea typeface="Amiri" pitchFamily="2" charset="-78"/>
+                <a:cs typeface="Amiri" pitchFamily="2" charset="-78"/>
+              </a:rPr>
               <a:t>ROLE PLAY B (Core+) — comparing two items.
 SET-UP IN THE BREAKOUT ROOM: A = examiner (reads the left column ONLY — the questions, in order), B = candidate (sees the task column; Core may use the help column), C = observer (ticks the feedback checklist). 1 minute preparation, about 3 minutes speaking, 1 minute feedback, then rotate.
 Task ! is the unexpected question: in the exam the candidate has not seen it — the examiner should read it without warning.
@@ -3156,6 +3200,7 @@
                   <a:srgbClr val="D4AF37"/>
                 </a:solidFill>
                 <a:latin typeface="Amiri" pitchFamily="2" charset="-78"/>
+                <a:ea typeface="Amiri" pitchFamily="2" charset="-78"/>
                 <a:cs typeface="Amiri" pitchFamily="2" charset="-78"/>
               </a:rPr>
               <a:t>م</a:t>
@@ -3362,6 +3407,7 @@
                   <a:srgbClr val="D4AF37"/>
                 </a:solidFill>
                 <a:latin typeface="Amiri" pitchFamily="2" charset="-78"/>
+                <a:ea typeface="Amiri" pitchFamily="2" charset="-78"/>
                 <a:cs typeface="Amiri" pitchFamily="2" charset="-78"/>
               </a:rPr>
               <a:t>وَرْشَةُ التَّحَدُّثِ — المَلَابِسُ وَالتَّسَوُّقُ</a:t>
@@ -3819,6 +3865,7 @@
                   <a:srgbClr val="D4AF37"/>
                 </a:solidFill>
                 <a:latin typeface="Amiri" pitchFamily="2" charset="-78"/>
+                <a:ea typeface="Amiri" pitchFamily="2" charset="-78"/>
                 <a:cs typeface="Amiri" pitchFamily="2" charset="-78"/>
               </a:rPr>
               <a:t>م</a:t>
@@ -4139,6 +4186,7 @@
                   <a:srgbClr val="8A6D1E"/>
                 </a:solidFill>
                 <a:latin typeface="Amiri" pitchFamily="2" charset="-78"/>
+                <a:ea typeface="Amiri" pitchFamily="2" charset="-78"/>
                 <a:cs typeface="Amiri" pitchFamily="2" charset="-78"/>
               </a:rPr>
               <a:t>أُرْجِعُ هَدِيَّةً</a:t>
@@ -4419,6 +4467,7 @@
                   <a:srgbClr val="1B3B6F"/>
                 </a:solidFill>
                 <a:latin typeface="Amiri" pitchFamily="2" charset="-78"/>
+                <a:ea typeface="Amiri" pitchFamily="2" charset="-78"/>
                 <a:cs typeface="Amiri" pitchFamily="2" charset="-78"/>
               </a:rPr>
               <a:t>أُرِيدُ أَنْ أُرْجِعَ … لِأَنَّهُ …</a:t>
@@ -4495,6 +4544,7 @@
                   <a:srgbClr val="1B3B6F"/>
                 </a:solidFill>
                 <a:latin typeface="Amiri" pitchFamily="2" charset="-78"/>
+                <a:ea typeface="Amiri" pitchFamily="2" charset="-78"/>
                 <a:cs typeface="Amiri" pitchFamily="2" charset="-78"/>
               </a:rPr>
               <a:t>مَا المُشْكِلَةُ؟</a:t>
@@ -4598,6 +4648,7 @@
                   <a:srgbClr val="1B3B6F"/>
                 </a:solidFill>
                 <a:latin typeface="Amiri" pitchFamily="2" charset="-78"/>
+                <a:ea typeface="Amiri" pitchFamily="2" charset="-78"/>
                 <a:cs typeface="Amiri" pitchFamily="2" charset="-78"/>
               </a:rPr>
               <a:t>اشْتَرَتْهُ … قَبْلَ …</a:t>
@@ -4674,6 +4725,7 @@
                   <a:srgbClr val="1B3B6F"/>
                 </a:solidFill>
                 <a:latin typeface="Amiri" pitchFamily="2" charset="-78"/>
+                <a:ea typeface="Amiri" pitchFamily="2" charset="-78"/>
                 <a:cs typeface="Amiri" pitchFamily="2" charset="-78"/>
               </a:rPr>
               <a:t>مَتَى اشْتَرَيْتَهُ؟</a:t>
@@ -4777,6 +4829,7 @@
                   <a:srgbClr val="1B3B6F"/>
                 </a:solidFill>
                 <a:latin typeface="Amiri" pitchFamily="2" charset="-78"/>
+                <a:ea typeface="Amiri" pitchFamily="2" charset="-78"/>
                 <a:cs typeface="Amiri" pitchFamily="2" charset="-78"/>
               </a:rPr>
               <a:t>أُفَضِّلُ … لِأَنَّ …</a:t>
@@ -4853,6 +4906,7 @@
                   <a:srgbClr val="1B3B6F"/>
                 </a:solidFill>
                 <a:latin typeface="Amiri" pitchFamily="2" charset="-78"/>
+                <a:ea typeface="Amiri" pitchFamily="2" charset="-78"/>
                 <a:cs typeface="Amiri" pitchFamily="2" charset="-78"/>
               </a:rPr>
               <a:t>هَلْ تُرِيدُ مَقَاسًا أَكْبَرَ أَمْ نُقُودَكَ؟</a:t>
@@ -4956,6 +5010,7 @@
                   <a:srgbClr val="1B3B6F"/>
                 </a:solidFill>
                 <a:latin typeface="Amiri" pitchFamily="2" charset="-78"/>
+                <a:ea typeface="Amiri" pitchFamily="2" charset="-78"/>
                 <a:cs typeface="Amiri" pitchFamily="2" charset="-78"/>
               </a:rPr>
               <a:t>هَلْ عِنْدَكُمْ …؟</a:t>
@@ -5032,6 +5087,7 @@
                   <a:srgbClr val="1B3B6F"/>
                 </a:solidFill>
                 <a:latin typeface="Amiri" pitchFamily="2" charset="-78"/>
+                <a:ea typeface="Amiri" pitchFamily="2" charset="-78"/>
                 <a:cs typeface="Amiri" pitchFamily="2" charset="-78"/>
               </a:rPr>
               <a:t>… لِلْأَسَفِ لَيْسَ عِنْدَنَا مَقَاسٌ أَكْبَرُ بِهٰذَا اللَّوْنِ.</a:t>
@@ -5135,6 +5191,7 @@
                   <a:srgbClr val="1B3B6F"/>
                 </a:solidFill>
                 <a:latin typeface="Amiri" pitchFamily="2" charset="-78"/>
+                <a:ea typeface="Amiri" pitchFamily="2" charset="-78"/>
                 <a:cs typeface="Amiri" pitchFamily="2" charset="-78"/>
               </a:rPr>
               <a:t>سَأَشْكُرُهَا … وَسَأَقُولُ …</a:t>
@@ -5211,6 +5268,7 @@
                   <a:srgbClr val="1B3B6F"/>
                 </a:solidFill>
                 <a:latin typeface="Amiri" pitchFamily="2" charset="-78"/>
+                <a:ea typeface="Amiri" pitchFamily="2" charset="-78"/>
                 <a:cs typeface="Amiri" pitchFamily="2" charset="-78"/>
               </a:rPr>
               <a:t>مَاذَا سَتَقُولُ لِخَالَتِكَ؟</a:t>
@@ -5420,6 +5478,7 @@
                   <a:srgbClr val="D4AF37"/>
                 </a:solidFill>
                 <a:latin typeface="Amiri" pitchFamily="2" charset="-78"/>
+                <a:ea typeface="Amiri" pitchFamily="2" charset="-78"/>
                 <a:cs typeface="Amiri" pitchFamily="2" charset="-78"/>
               </a:rPr>
               <a:t>م</a:t>
@@ -5740,6 +5799,7 @@
                   <a:srgbClr val="8A6D1E"/>
                 </a:solidFill>
                 <a:latin typeface="Amiri" pitchFamily="2" charset="-78"/>
+                <a:ea typeface="Amiri" pitchFamily="2" charset="-78"/>
                 <a:cs typeface="Amiri" pitchFamily="2" charset="-78"/>
               </a:rPr>
               <a:t>المُوضَةُ السَّرِيعَةُ</a:t>
@@ -6020,6 +6080,7 @@
                   <a:srgbClr val="1B3B6F"/>
                 </a:solidFill>
                 <a:latin typeface="Amiri" pitchFamily="2" charset="-78"/>
+                <a:ea typeface="Amiri" pitchFamily="2" charset="-78"/>
                 <a:cs typeface="Amiri" pitchFamily="2" charset="-78"/>
               </a:rPr>
               <a:t>لِأَنَّهَا … وَلِأَنَّ …</a:t>
@@ -6096,6 +6157,7 @@
                   <a:srgbClr val="1B3B6F"/>
                 </a:solidFill>
                 <a:latin typeface="Amiri" pitchFamily="2" charset="-78"/>
+                <a:ea typeface="Amiri" pitchFamily="2" charset="-78"/>
                 <a:cs typeface="Amiri" pitchFamily="2" charset="-78"/>
               </a:rPr>
               <a:t>لِمَاذَا يَشْتَرِي الشَّبَابُ مَلَابِسَ كَثِيرَةً؟</a:t>
@@ -6199,6 +6261,7 @@
                   <a:srgbClr val="1B3B6F"/>
                 </a:solidFill>
                 <a:latin typeface="Amiri" pitchFamily="2" charset="-78"/>
+                <a:ea typeface="Amiri" pitchFamily="2" charset="-78"/>
                 <a:cs typeface="Amiri" pitchFamily="2" charset="-78"/>
               </a:rPr>
               <a:t>المُشْكِلَةُ أَنَّ … مِمَّا …</a:t>
@@ -6275,6 +6338,7 @@
                   <a:srgbClr val="1B3B6F"/>
                 </a:solidFill>
                 <a:latin typeface="Amiri" pitchFamily="2" charset="-78"/>
+                <a:ea typeface="Amiri" pitchFamily="2" charset="-78"/>
                 <a:cs typeface="Amiri" pitchFamily="2" charset="-78"/>
               </a:rPr>
               <a:t>مَا المُشْكِلَةُ فِي ذٰلِكَ؟</a:t>
@@ -6378,6 +6442,7 @@
                   <a:srgbClr val="1B3B6F"/>
                 </a:solidFill>
                 <a:latin typeface="Amiri" pitchFamily="2" charset="-78"/>
+                <a:ea typeface="Amiri" pitchFamily="2" charset="-78"/>
                 <a:cs typeface="Amiri" pitchFamily="2" charset="-78"/>
               </a:rPr>
               <a:t>كُنْتُ … أَمَّا الآنَ فَأَشْتَرِي …</a:t>
@@ -6454,6 +6519,7 @@
                   <a:srgbClr val="1B3B6F"/>
                 </a:solidFill>
                 <a:latin typeface="Amiri" pitchFamily="2" charset="-78"/>
+                <a:ea typeface="Amiri" pitchFamily="2" charset="-78"/>
                 <a:cs typeface="Amiri" pitchFamily="2" charset="-78"/>
               </a:rPr>
               <a:t>هَلْ غَيَّرْتَ عَادَاتِكَ؟</a:t>
@@ -6557,6 +6623,7 @@
                   <a:srgbClr val="1B3B6F"/>
                 </a:solidFill>
                 <a:latin typeface="Amiri" pitchFamily="2" charset="-78"/>
+                <a:ea typeface="Amiri" pitchFamily="2" charset="-78"/>
                 <a:cs typeface="Amiri" pitchFamily="2" charset="-78"/>
               </a:rPr>
               <a:t>صَحِيحٌ أَنَّ … غَيْرَ أَنَّ …</a:t>
@@ -6633,6 +6700,7 @@
                   <a:srgbClr val="1B3B6F"/>
                 </a:solidFill>
                 <a:latin typeface="Amiri" pitchFamily="2" charset="-78"/>
+                <a:ea typeface="Amiri" pitchFamily="2" charset="-78"/>
                 <a:cs typeface="Amiri" pitchFamily="2" charset="-78"/>
               </a:rPr>
               <a:t>لٰكِنَّ المَلَابِسَ الجَيِّدَةَ غَالِيَةٌ!</a:t>
@@ -6736,6 +6804,7 @@
                   <a:srgbClr val="1B3B6F"/>
                 </a:solidFill>
                 <a:latin typeface="Amiri" pitchFamily="2" charset="-78"/>
+                <a:ea typeface="Amiri" pitchFamily="2" charset="-78"/>
                 <a:cs typeface="Amiri" pitchFamily="2" charset="-78"/>
               </a:rPr>
               <a:t>لَوْ كُنْتُ …، لَصَنَعْتُ …</a:t>
@@ -6812,6 +6881,7 @@
                   <a:srgbClr val="1B3B6F"/>
                 </a:solidFill>
                 <a:latin typeface="Amiri" pitchFamily="2" charset="-78"/>
+                <a:ea typeface="Amiri" pitchFamily="2" charset="-78"/>
                 <a:cs typeface="Amiri" pitchFamily="2" charset="-78"/>
               </a:rPr>
               <a:t>لَوْ كُنْتَ مُدِيرَ شَرِكَةِ مَلَابِسَ، مَاذَا تُغَيِّرُ؟</a:t>
@@ -7021,6 +7091,7 @@
                   <a:srgbClr val="D4AF37"/>
                 </a:solidFill>
                 <a:latin typeface="Amiri" pitchFamily="2" charset="-78"/>
+                <a:ea typeface="Amiri" pitchFamily="2" charset="-78"/>
                 <a:cs typeface="Amiri" pitchFamily="2" charset="-78"/>
               </a:rPr>
               <a:t>م</a:t>
@@ -7341,6 +7412,7 @@
                   <a:srgbClr val="8A6D1E"/>
                 </a:solidFill>
                 <a:latin typeface="Amiri" pitchFamily="2" charset="-78"/>
+                <a:ea typeface="Amiri" pitchFamily="2" charset="-78"/>
                 <a:cs typeface="Amiri" pitchFamily="2" charset="-78"/>
               </a:rPr>
               <a:t>وَرَقَةُ المُلَاحِظِ</a:t>
@@ -8811,6 +8883,7 @@
                   <a:srgbClr val="D4AF37"/>
                 </a:solidFill>
                 <a:latin typeface="Amiri" pitchFamily="2" charset="-78"/>
+                <a:ea typeface="Amiri" pitchFamily="2" charset="-78"/>
                 <a:cs typeface="Amiri" pitchFamily="2" charset="-78"/>
               </a:rPr>
               <a:t>م</a:t>
@@ -9131,6 +9204,7 @@
                   <a:srgbClr val="8A6D1E"/>
                 </a:solidFill>
                 <a:latin typeface="Amiri" pitchFamily="2" charset="-78"/>
+                <a:ea typeface="Amiri" pitchFamily="2" charset="-78"/>
                 <a:cs typeface="Amiri" pitchFamily="2" charset="-78"/>
               </a:rPr>
               <a:t>نَمُوذَجُ الإِجَابَةِ</a:t>
@@ -9373,6 +9447,7 @@
                   <a:srgbClr val="1B3B6F"/>
                 </a:solidFill>
                 <a:latin typeface="Amiri" pitchFamily="2" charset="-78"/>
+                <a:ea typeface="Amiri" pitchFamily="2" charset="-78"/>
                 <a:cs typeface="Amiri" pitchFamily="2" charset="-78"/>
               </a:rPr>
               <a:t>أَبْحَثُ عَنْ سُتْرَةٍ لِلشِّتَاءِ، مِنْ فَضْلِكَ.</a:t>
@@ -9449,6 +9524,7 @@
                   <a:srgbClr val="1B3B6F"/>
                 </a:solidFill>
                 <a:latin typeface="Amiri" pitchFamily="2" charset="-78"/>
+                <a:ea typeface="Amiri" pitchFamily="2" charset="-78"/>
                 <a:cs typeface="Amiri" pitchFamily="2" charset="-78"/>
               </a:rPr>
               <a:t>أَهْلًا، كَيْفَ أُسَاعِدُكَ؟</a:t>
@@ -9552,6 +9628,7 @@
                   <a:srgbClr val="1B3B6F"/>
                 </a:solidFill>
                 <a:latin typeface="Amiri" pitchFamily="2" charset="-78"/>
+                <a:ea typeface="Amiri" pitchFamily="2" charset="-78"/>
                 <a:cs typeface="Amiri" pitchFamily="2" charset="-78"/>
               </a:rPr>
               <a:t>أُرِيدُ سُتْرَةً سَوْدَاءَ أَوْ زَرْقَاءَ غَامِقَةً.</a:t>
@@ -9628,6 +9705,7 @@
                   <a:srgbClr val="1B3B6F"/>
                 </a:solidFill>
                 <a:latin typeface="Amiri" pitchFamily="2" charset="-78"/>
+                <a:ea typeface="Amiri" pitchFamily="2" charset="-78"/>
                 <a:cs typeface="Amiri" pitchFamily="2" charset="-78"/>
               </a:rPr>
               <a:t>أَيَّ لَوْنٍ تُرِيدُ؟</a:t>
@@ -9731,6 +9809,7 @@
                   <a:srgbClr val="1B3B6F"/>
                 </a:solidFill>
                 <a:latin typeface="Amiri" pitchFamily="2" charset="-78"/>
+                <a:ea typeface="Amiri" pitchFamily="2" charset="-78"/>
                 <a:cs typeface="Amiri" pitchFamily="2" charset="-78"/>
               </a:rPr>
               <a:t>مَقَاسِي مُتَوَسِّطٌ.</a:t>
@@ -9807,6 +9886,7 @@
                   <a:srgbClr val="1B3B6F"/>
                 </a:solidFill>
                 <a:latin typeface="Amiri" pitchFamily="2" charset="-78"/>
+                <a:ea typeface="Amiri" pitchFamily="2" charset="-78"/>
                 <a:cs typeface="Amiri" pitchFamily="2" charset="-78"/>
               </a:rPr>
               <a:t>مَا مَقَاسُكَ؟</a:t>
@@ -9910,6 +9990,7 @@
                   <a:srgbClr val="1B3B6F"/>
                 </a:solidFill>
                 <a:latin typeface="Amiri" pitchFamily="2" charset="-78"/>
+                <a:ea typeface="Amiri" pitchFamily="2" charset="-78"/>
                 <a:cs typeface="Amiri" pitchFamily="2" charset="-78"/>
               </a:rPr>
               <a:t>هَلْ يُمْكِنُ أَنْ أُجَرِّبَهَا؟ وَبِكَمْ هِيَ؟</a:t>
@@ -9986,6 +10067,7 @@
                   <a:srgbClr val="1B3B6F"/>
                 </a:solidFill>
                 <a:latin typeface="Amiri" pitchFamily="2" charset="-78"/>
+                <a:ea typeface="Amiri" pitchFamily="2" charset="-78"/>
                 <a:cs typeface="Amiri" pitchFamily="2" charset="-78"/>
               </a:rPr>
               <a:t>تَفَضَّلْ، هٰذِهِ السُّتْرَةُ الزَّرْقَاءُ.</a:t>
@@ -10089,6 +10171,7 @@
                   <a:srgbClr val="1B3B6F"/>
                 </a:solidFill>
                 <a:latin typeface="Amiri" pitchFamily="2" charset="-78"/>
+                <a:ea typeface="Amiri" pitchFamily="2" charset="-78"/>
                 <a:cs typeface="Amiri" pitchFamily="2" charset="-78"/>
               </a:rPr>
               <a:t>سَأَدْفَعُ بِالبِطَاقَةِ، مِنْ فَضْلِكَ.</a:t>
@@ -10165,6 +10248,7 @@
                   <a:srgbClr val="1B3B6F"/>
                 </a:solidFill>
                 <a:latin typeface="Amiri" pitchFamily="2" charset="-78"/>
+                <a:ea typeface="Amiri" pitchFamily="2" charset="-78"/>
                 <a:cs typeface="Amiri" pitchFamily="2" charset="-78"/>
               </a:rPr>
               <a:t>كَيْفَ تَدْفَعُ؟</a:t>
@@ -10374,6 +10458,7 @@
                   <a:srgbClr val="D4AF37"/>
                 </a:solidFill>
                 <a:latin typeface="Amiri" pitchFamily="2" charset="-78"/>
+                <a:ea typeface="Amiri" pitchFamily="2" charset="-78"/>
                 <a:cs typeface="Amiri" pitchFamily="2" charset="-78"/>
               </a:rPr>
               <a:t>م</a:t>
@@ -10694,6 +10779,7 @@
                   <a:srgbClr val="8A6D1E"/>
                 </a:solidFill>
                 <a:latin typeface="Amiri" pitchFamily="2" charset="-78"/>
+                <a:ea typeface="Amiri" pitchFamily="2" charset="-78"/>
                 <a:cs typeface="Amiri" pitchFamily="2" charset="-78"/>
               </a:rPr>
               <a:t>نَمُوذَجُ الإِجَابَةِ</a:t>
@@ -10936,6 +11022,7 @@
                   <a:srgbClr val="1B3B6F"/>
                 </a:solidFill>
                 <a:latin typeface="Amiri" pitchFamily="2" charset="-78"/>
+                <a:ea typeface="Amiri" pitchFamily="2" charset="-78"/>
                 <a:cs typeface="Amiri" pitchFamily="2" charset="-78"/>
               </a:rPr>
               <a:t>بِكَمْ هٰذَا الأَبْيَضُ؟ وَبِكَمْ ذٰلِكَ الأَحْمَرُ؟</a:t>
@@ -11012,6 +11099,7 @@
                   <a:srgbClr val="1B3B6F"/>
                 </a:solidFill>
                 <a:latin typeface="Amiri" pitchFamily="2" charset="-78"/>
+                <a:ea typeface="Amiri" pitchFamily="2" charset="-78"/>
                 <a:cs typeface="Amiri" pitchFamily="2" charset="-78"/>
               </a:rPr>
               <a:t>عِنْدَنَا هٰذَا الحِذَاءُ الأَبْيَضُ، وَذٰلِكَ الحِذَاءُ الأَحْمَرُ.</a:t>
@@ -11115,6 +11203,7 @@
                   <a:srgbClr val="1B3B6F"/>
                 </a:solidFill>
                 <a:latin typeface="Amiri" pitchFamily="2" charset="-78"/>
+                <a:ea typeface="Amiri" pitchFamily="2" charset="-78"/>
                 <a:cs typeface="Amiri" pitchFamily="2" charset="-78"/>
               </a:rPr>
               <a:t>الأَحْمَرُ أَرْخَصُ مِنَ الأَبْيَضِ بِخَمْسَةَ عَشَرَ دِينَارًا.</a:t>
@@ -11191,6 +11280,7 @@
                   <a:srgbClr val="1B3B6F"/>
                 </a:solidFill>
                 <a:latin typeface="Amiri" pitchFamily="2" charset="-78"/>
+                <a:ea typeface="Amiri" pitchFamily="2" charset="-78"/>
                 <a:cs typeface="Amiri" pitchFamily="2" charset="-78"/>
               </a:rPr>
               <a:t>الأَبْيَضُ بِسِتِّينَ، وَالأَحْمَرُ بِخَمْسَةٍ وَأَرْبَعِينَ.</a:t>
@@ -11294,6 +11384,7 @@
                   <a:srgbClr val="1B3B6F"/>
                 </a:solidFill>
                 <a:latin typeface="Amiri" pitchFamily="2" charset="-78"/>
+                <a:ea typeface="Amiri" pitchFamily="2" charset="-78"/>
                 <a:cs typeface="Amiri" pitchFamily="2" charset="-78"/>
               </a:rPr>
               <a:t>أَيُّهُمَا أَفْضَلُ لِلْجَرْيِ؟ لِأَنِّي أَجْرِي كُلَّ صَبَاحٍ.</a:t>
@@ -11370,6 +11461,7 @@
                   <a:srgbClr val="1B3B6F"/>
                 </a:solidFill>
                 <a:latin typeface="Amiri" pitchFamily="2" charset="-78"/>
+                <a:ea typeface="Amiri" pitchFamily="2" charset="-78"/>
                 <a:cs typeface="Amiri" pitchFamily="2" charset="-78"/>
               </a:rPr>
               <a:t>لٰكِنَّ الأَبْيَضَ أَخَفُّ وَأَقْوَى.</a:t>
@@ -11473,6 +11565,7 @@
                   <a:srgbClr val="1B3B6F"/>
                 </a:solidFill>
                 <a:latin typeface="Amiri" pitchFamily="2" charset="-78"/>
+                <a:ea typeface="Amiri" pitchFamily="2" charset="-78"/>
                 <a:cs typeface="Amiri" pitchFamily="2" charset="-78"/>
               </a:rPr>
               <a:t>إِذَنْ سَآخُذُ الأَبْيَضَ، لِأَنَّ الجَوْدَةَ أَهَمُّ مِنَ السِّعْرِ.</a:t>
@@ -11549,6 +11642,7 @@
                   <a:srgbClr val="1B3B6F"/>
                 </a:solidFill>
                 <a:latin typeface="Amiri" pitchFamily="2" charset="-78"/>
+                <a:ea typeface="Amiri" pitchFamily="2" charset="-78"/>
                 <a:cs typeface="Amiri" pitchFamily="2" charset="-78"/>
               </a:rPr>
               <a:t>الأَبْيَضُ بِالتَّأْكِيدِ.</a:t>
@@ -11652,6 +11746,7 @@
                   <a:srgbClr val="1B3B6F"/>
                 </a:solidFill>
                 <a:latin typeface="Amiri" pitchFamily="2" charset="-78"/>
+                <a:ea typeface="Amiri" pitchFamily="2" charset="-78"/>
                 <a:cs typeface="Amiri" pitchFamily="2" charset="-78"/>
               </a:rPr>
               <a:t>لَا، شُكْرًا، عِنْدِي جَوَارِبُ كَثِيرَةٌ فِي البَيْتِ.</a:t>
@@ -11728,6 +11823,7 @@
                   <a:srgbClr val="1B3B6F"/>
                 </a:solidFill>
                 <a:latin typeface="Amiri" pitchFamily="2" charset="-78"/>
+                <a:ea typeface="Amiri" pitchFamily="2" charset="-78"/>
                 <a:cs typeface="Amiri" pitchFamily="2" charset="-78"/>
               </a:rPr>
               <a:t>هَلْ تُرِيدُ جَوَارِبَ أَيْضًا؟</a:t>
@@ -11937,6 +12033,7 @@
                   <a:srgbClr val="D4AF37"/>
                 </a:solidFill>
                 <a:latin typeface="Amiri" pitchFamily="2" charset="-78"/>
+                <a:ea typeface="Amiri" pitchFamily="2" charset="-78"/>
                 <a:cs typeface="Amiri" pitchFamily="2" charset="-78"/>
               </a:rPr>
               <a:t>م</a:t>
@@ -12257,6 +12354,7 @@
                   <a:srgbClr val="8A6D1E"/>
                 </a:solidFill>
                 <a:latin typeface="Amiri" pitchFamily="2" charset="-78"/>
+                <a:ea typeface="Amiri" pitchFamily="2" charset="-78"/>
                 <a:cs typeface="Amiri" pitchFamily="2" charset="-78"/>
               </a:rPr>
               <a:t>نَمُوذَجُ الإِجَابَةِ</a:t>
@@ -12499,6 +12597,7 @@
                   <a:srgbClr val="1B3B6F"/>
                 </a:solidFill>
                 <a:latin typeface="Amiri" pitchFamily="2" charset="-78"/>
+                <a:ea typeface="Amiri" pitchFamily="2" charset="-78"/>
                 <a:cs typeface="Amiri" pitchFamily="2" charset="-78"/>
               </a:rPr>
               <a:t>أُرِيدُ أَنْ أُرْجِعَ هٰذَا القَمِيصَ، لِأَنَّهُ ضَيِّقٌ جِدًّا عَلَيَّ.</a:t>
@@ -12575,6 +12674,7 @@
                   <a:srgbClr val="1B3B6F"/>
                 </a:solidFill>
                 <a:latin typeface="Amiri" pitchFamily="2" charset="-78"/>
+                <a:ea typeface="Amiri" pitchFamily="2" charset="-78"/>
                 <a:cs typeface="Amiri" pitchFamily="2" charset="-78"/>
               </a:rPr>
               <a:t>مَا المُشْكِلَةُ؟</a:t>
@@ -12678,6 +12778,7 @@
                   <a:srgbClr val="1B3B6F"/>
                 </a:solidFill>
                 <a:latin typeface="Amiri" pitchFamily="2" charset="-78"/>
+                <a:ea typeface="Amiri" pitchFamily="2" charset="-78"/>
                 <a:cs typeface="Amiri" pitchFamily="2" charset="-78"/>
               </a:rPr>
               <a:t>اشْتَرَتْهُ لِي خَالَتِي هَدِيَّةً قَبْلَ أُسْبُوعٍ، وَهٰذَا هُوَ الإِيصَالُ.</a:t>
@@ -12754,6 +12855,7 @@
                   <a:srgbClr val="1B3B6F"/>
                 </a:solidFill>
                 <a:latin typeface="Amiri" pitchFamily="2" charset="-78"/>
+                <a:ea typeface="Amiri" pitchFamily="2" charset="-78"/>
                 <a:cs typeface="Amiri" pitchFamily="2" charset="-78"/>
               </a:rPr>
               <a:t>مَتَى اشْتَرَيْتَهُ؟</a:t>
@@ -12857,6 +12959,7 @@
                   <a:srgbClr val="1B3B6F"/>
                 </a:solidFill>
                 <a:latin typeface="Amiri" pitchFamily="2" charset="-78"/>
+                <a:ea typeface="Amiri" pitchFamily="2" charset="-78"/>
                 <a:cs typeface="Amiri" pitchFamily="2" charset="-78"/>
               </a:rPr>
               <a:t>أُفَضِّلُ مَقَاسًا أَكْبَرَ، لِأَنَّ اللَّوْنَ يُعْجِبُنِي كَثِيرًا.</a:t>
@@ -12933,6 +13036,7 @@
                   <a:srgbClr val="1B3B6F"/>
                 </a:solidFill>
                 <a:latin typeface="Amiri" pitchFamily="2" charset="-78"/>
+                <a:ea typeface="Amiri" pitchFamily="2" charset="-78"/>
                 <a:cs typeface="Amiri" pitchFamily="2" charset="-78"/>
               </a:rPr>
               <a:t>هَلْ تُرِيدُ مَقَاسًا أَكْبَرَ أَمْ نُقُودَكَ؟</a:t>
@@ -13036,6 +13140,7 @@
                   <a:srgbClr val="1B3B6F"/>
                 </a:solidFill>
                 <a:latin typeface="Amiri" pitchFamily="2" charset="-78"/>
+                <a:ea typeface="Amiri" pitchFamily="2" charset="-78"/>
                 <a:cs typeface="Amiri" pitchFamily="2" charset="-78"/>
               </a:rPr>
               <a:t>هَلْ عِنْدَكُمْ هٰذَا القَمِيصُ نَفْسُهُ بِاللَّوْنِ الأَخْضَرِ؟</a:t>
@@ -13112,6 +13217,7 @@
                   <a:srgbClr val="1B3B6F"/>
                 </a:solidFill>
                 <a:latin typeface="Amiri" pitchFamily="2" charset="-78"/>
+                <a:ea typeface="Amiri" pitchFamily="2" charset="-78"/>
                 <a:cs typeface="Amiri" pitchFamily="2" charset="-78"/>
               </a:rPr>
               <a:t>… لِلْأَسَفِ لَيْسَ عِنْدَنَا مَقَاسٌ أَكْبَرُ بِهٰذَا اللَّوْنِ.</a:t>
@@ -13215,6 +13321,7 @@
                   <a:srgbClr val="1B3B6F"/>
                 </a:solidFill>
                 <a:latin typeface="Amiri" pitchFamily="2" charset="-78"/>
+                <a:ea typeface="Amiri" pitchFamily="2" charset="-78"/>
                 <a:cs typeface="Amiri" pitchFamily="2" charset="-78"/>
               </a:rPr>
               <a:t>سَأَشْكُرُهَا عَلَى الهَدِيَّةِ، وَسَأَلْبَسُ القَمِيصَ الجَدِيدَ عِنْدَمَا أَزُورُهَا.</a:t>
@@ -13291,6 +13398,7 @@
                   <a:srgbClr val="1B3B6F"/>
                 </a:solidFill>
                 <a:latin typeface="Amiri" pitchFamily="2" charset="-78"/>
+                <a:ea typeface="Amiri" pitchFamily="2" charset="-78"/>
                 <a:cs typeface="Amiri" pitchFamily="2" charset="-78"/>
               </a:rPr>
               <a:t>مَاذَا سَتَقُولُ لِخَالَتِكَ؟</a:t>
@@ -13500,6 +13608,7 @@
                   <a:srgbClr val="D4AF37"/>
                 </a:solidFill>
                 <a:latin typeface="Amiri" pitchFamily="2" charset="-78"/>
+                <a:ea typeface="Amiri" pitchFamily="2" charset="-78"/>
                 <a:cs typeface="Amiri" pitchFamily="2" charset="-78"/>
               </a:rPr>
               <a:t>م</a:t>
@@ -13820,6 +13929,7 @@
                   <a:srgbClr val="8A6D1E"/>
                 </a:solidFill>
                 <a:latin typeface="Amiri" pitchFamily="2" charset="-78"/>
+                <a:ea typeface="Amiri" pitchFamily="2" charset="-78"/>
                 <a:cs typeface="Amiri" pitchFamily="2" charset="-78"/>
               </a:rPr>
               <a:t>نَمُوذَجُ الإِجَابَةِ</a:t>
@@ -14062,6 +14172,7 @@
                   <a:srgbClr val="1B3B6F"/>
                 </a:solidFill>
                 <a:latin typeface="Amiri" pitchFamily="2" charset="-78"/>
+                <a:ea typeface="Amiri" pitchFamily="2" charset="-78"/>
                 <a:cs typeface="Amiri" pitchFamily="2" charset="-78"/>
               </a:rPr>
               <a:t>لِأَنَّهَا رَخِيصَةٌ جِدًّا، وَلِأَنَّ وَسَائِلَ التَّوَاصُلِ تَعْرِضُ مُوضَةً جَدِيدَةً كُلَّ أُسْبُوعٍ.</a:t>
@@ -14138,6 +14249,7 @@
                   <a:srgbClr val="1B3B6F"/>
                 </a:solidFill>
                 <a:latin typeface="Amiri" pitchFamily="2" charset="-78"/>
+                <a:ea typeface="Amiri" pitchFamily="2" charset="-78"/>
                 <a:cs typeface="Amiri" pitchFamily="2" charset="-78"/>
               </a:rPr>
               <a:t>لِمَاذَا يَشْتَرِي الشَّبَابُ مَلَابِسَ كَثِيرَةً؟</a:t>
@@ -14241,6 +14353,7 @@
                   <a:srgbClr val="1B3B6F"/>
                 </a:solidFill>
                 <a:latin typeface="Amiri" pitchFamily="2" charset="-78"/>
+                <a:ea typeface="Amiri" pitchFamily="2" charset="-78"/>
                 <a:cs typeface="Amiri" pitchFamily="2" charset="-78"/>
               </a:rPr>
               <a:t>المُشْكِلَةُ أَنَّنَا نَرْمِي المَلَابِسَ بَعْدَ أَشْهُرٍ قَلِيلَةٍ، مِمَّا يَمْلَأُ الأَرْضَ بِالنُّفَايَاتِ.</a:t>
@@ -14317,6 +14430,7 @@
                   <a:srgbClr val="1B3B6F"/>
                 </a:solidFill>
                 <a:latin typeface="Amiri" pitchFamily="2" charset="-78"/>
+                <a:ea typeface="Amiri" pitchFamily="2" charset="-78"/>
                 <a:cs typeface="Amiri" pitchFamily="2" charset="-78"/>
               </a:rPr>
               <a:t>مَا المُشْكِلَةُ فِي ذٰلِكَ؟</a:t>
@@ -14420,6 +14534,7 @@
                   <a:srgbClr val="1B3B6F"/>
                 </a:solidFill>
                 <a:latin typeface="Amiri" pitchFamily="2" charset="-78"/>
+                <a:ea typeface="Amiri" pitchFamily="2" charset="-78"/>
                 <a:cs typeface="Amiri" pitchFamily="2" charset="-78"/>
               </a:rPr>
               <a:t>كُنْتُ أَشْتَرِي قَمِيصًا كُلَّ أُسْبُوعٍ، أَمَّا الآنَ فَأَشْتَرِي أَقَلَّ وَأَخْتَارُ المَلَابِسَ المُسْتَعْمَلَةَ أَحْيَانًا.</a:t>
@@ -14496,6 +14611,7 @@
                   <a:srgbClr val="1B3B6F"/>
                 </a:solidFill>
                 <a:latin typeface="Amiri" pitchFamily="2" charset="-78"/>
+                <a:ea typeface="Amiri" pitchFamily="2" charset="-78"/>
                 <a:cs typeface="Amiri" pitchFamily="2" charset="-78"/>
               </a:rPr>
               <a:t>هَلْ غَيَّرْتَ عَادَاتِكَ؟</a:t>
@@ -14599,6 +14715,7 @@
                   <a:srgbClr val="1B3B6F"/>
                 </a:solidFill>
                 <a:latin typeface="Amiri" pitchFamily="2" charset="-78"/>
+                <a:ea typeface="Amiri" pitchFamily="2" charset="-78"/>
                 <a:cs typeface="Amiri" pitchFamily="2" charset="-78"/>
               </a:rPr>
               <a:t>صَحِيحٌ أَنَّهَا أَغْلَى، غَيْرَ أَنَّهَا تَبْقَى سَنَوَاتٍ، فَهِيَ فِي النِّهَايَةِ أَرْخَصُ.</a:t>
@@ -14675,6 +14792,7 @@
                   <a:srgbClr val="1B3B6F"/>
                 </a:solidFill>
                 <a:latin typeface="Amiri" pitchFamily="2" charset="-78"/>
+                <a:ea typeface="Amiri" pitchFamily="2" charset="-78"/>
                 <a:cs typeface="Amiri" pitchFamily="2" charset="-78"/>
               </a:rPr>
               <a:t>لٰكِنَّ المَلَابِسَ الجَيِّدَةَ غَالِيَةٌ!</a:t>
@@ -14778,6 +14896,7 @@
                   <a:srgbClr val="1B3B6F"/>
                 </a:solidFill>
                 <a:latin typeface="Amiri" pitchFamily="2" charset="-78"/>
+                <a:ea typeface="Amiri" pitchFamily="2" charset="-78"/>
                 <a:cs typeface="Amiri" pitchFamily="2" charset="-78"/>
               </a:rPr>
               <a:t>لَوْ كُنْتُ مُدِيرَ شَرِكَةٍ، لَصَنَعْتُ مَلَابِسَ مِنْ مَوَادَّ مُعَادَةِ التَّدْوِيرِ، وَلَأَصْلَحْتُ المَلَابِسَ القَدِيمَةَ مَجَّانًا.</a:t>
@@ -14854,6 +14973,7 @@
                   <a:srgbClr val="1B3B6F"/>
                 </a:solidFill>
                 <a:latin typeface="Amiri" pitchFamily="2" charset="-78"/>
+                <a:ea typeface="Amiri" pitchFamily="2" charset="-78"/>
                 <a:cs typeface="Amiri" pitchFamily="2" charset="-78"/>
               </a:rPr>
               <a:t>لَوْ كُنْتَ مُدِيرَ شَرِكَةِ مَلَابِسَ، مَاذَا تُغَيِّرُ؟</a:t>
@@ -15063,6 +15183,7 @@
                   <a:srgbClr val="D4AF37"/>
                 </a:solidFill>
                 <a:latin typeface="Amiri" pitchFamily="2" charset="-78"/>
+                <a:ea typeface="Amiri" pitchFamily="2" charset="-78"/>
                 <a:cs typeface="Amiri" pitchFamily="2" charset="-78"/>
               </a:rPr>
               <a:t>م</a:t>
@@ -15383,6 +15504,7 @@
                   <a:srgbClr val="8A6D1E"/>
                 </a:solidFill>
                 <a:latin typeface="Amiri" pitchFamily="2" charset="-78"/>
+                <a:ea typeface="Amiri" pitchFamily="2" charset="-78"/>
                 <a:cs typeface="Amiri" pitchFamily="2" charset="-78"/>
               </a:rPr>
               <a:t>مَلَابِسِي</a:t>
@@ -15663,6 +15785,7 @@
                   <a:srgbClr val="1B3B6F"/>
                 </a:solidFill>
                 <a:latin typeface="Amiri" pitchFamily="2" charset="-78"/>
+                <a:ea typeface="Amiri" pitchFamily="2" charset="-78"/>
                 <a:cs typeface="Amiri" pitchFamily="2" charset="-78"/>
               </a:rPr>
               <a:t>أَلْبَسُ … وَ…</a:t>
@@ -15739,6 +15862,7 @@
                   <a:srgbClr val="1B3B6F"/>
                 </a:solidFill>
                 <a:latin typeface="Amiri" pitchFamily="2" charset="-78"/>
+                <a:ea typeface="Amiri" pitchFamily="2" charset="-78"/>
                 <a:cs typeface="Amiri" pitchFamily="2" charset="-78"/>
               </a:rPr>
               <a:t>مَاذَا تَلْبَسُ الآنَ؟</a:t>
@@ -15907,6 +16031,7 @@
                   <a:srgbClr val="1B3B6F"/>
                 </a:solidFill>
                 <a:latin typeface="Amiri" pitchFamily="2" charset="-78"/>
+                <a:ea typeface="Amiri" pitchFamily="2" charset="-78"/>
                 <a:cs typeface="Amiri" pitchFamily="2" charset="-78"/>
               </a:rPr>
               <a:t>أُحِبُّ … لِأَنَّ …</a:t>
@@ -15983,6 +16108,7 @@
                   <a:srgbClr val="1B3B6F"/>
                 </a:solidFill>
                 <a:latin typeface="Amiri" pitchFamily="2" charset="-78"/>
+                <a:ea typeface="Amiri" pitchFamily="2" charset="-78"/>
                 <a:cs typeface="Amiri" pitchFamily="2" charset="-78"/>
               </a:rPr>
               <a:t>مَا مَلَابِسُكَ المُفَضَّلَةُ؟</a:t>
@@ -16151,6 +16277,7 @@
                   <a:srgbClr val="1B3B6F"/>
                 </a:solidFill>
                 <a:latin typeface="Amiri" pitchFamily="2" charset="-78"/>
+                <a:ea typeface="Amiri" pitchFamily="2" charset="-78"/>
                 <a:cs typeface="Amiri" pitchFamily="2" charset="-78"/>
               </a:rPr>
               <a:t>أَشْتَرِيهَا مِنْ …</a:t>
@@ -16227,6 +16354,7 @@
                   <a:srgbClr val="1B3B6F"/>
                 </a:solidFill>
                 <a:latin typeface="Amiri" pitchFamily="2" charset="-78"/>
+                <a:ea typeface="Amiri" pitchFamily="2" charset="-78"/>
                 <a:cs typeface="Amiri" pitchFamily="2" charset="-78"/>
               </a:rPr>
               <a:t>أَيْنَ تَشْتَرِي مَلَابِسَكَ؟</a:t>
@@ -16395,6 +16523,7 @@
                   <a:srgbClr val="1B3B6F"/>
                 </a:solidFill>
                 <a:latin typeface="Amiri" pitchFamily="2" charset="-78"/>
+                <a:ea typeface="Amiri" pitchFamily="2" charset="-78"/>
                 <a:cs typeface="Amiri" pitchFamily="2" charset="-78"/>
               </a:rPr>
               <a:t>نَعَمْ / لَا، …</a:t>
@@ -16471,6 +16600,7 @@
                   <a:srgbClr val="1B3B6F"/>
                 </a:solidFill>
                 <a:latin typeface="Amiri" pitchFamily="2" charset="-78"/>
+                <a:ea typeface="Amiri" pitchFamily="2" charset="-78"/>
                 <a:cs typeface="Amiri" pitchFamily="2" charset="-78"/>
               </a:rPr>
               <a:t>هَلْ تُحِبُّ التَّسَوُّقَ؟</a:t>
@@ -16639,6 +16769,7 @@
                   <a:srgbClr val="1B3B6F"/>
                 </a:solidFill>
                 <a:latin typeface="Amiri" pitchFamily="2" charset="-78"/>
+                <a:ea typeface="Amiri" pitchFamily="2" charset="-78"/>
                 <a:cs typeface="Amiri" pitchFamily="2" charset="-78"/>
               </a:rPr>
               <a:t>أَلْبَسُ … جَدِيدًا</a:t>
@@ -16715,6 +16846,7 @@
                   <a:srgbClr val="1B3B6F"/>
                 </a:solidFill>
                 <a:latin typeface="Amiri" pitchFamily="2" charset="-78"/>
+                <a:ea typeface="Amiri" pitchFamily="2" charset="-78"/>
                 <a:cs typeface="Amiri" pitchFamily="2" charset="-78"/>
               </a:rPr>
               <a:t>مَاذَا تَلْبَسُ فِي الأَعْيَادِ؟</a:t>
@@ -16869,6 +17001,7 @@
                   <a:srgbClr val="1B3B6F"/>
                 </a:solidFill>
                 <a:latin typeface="Amiri" pitchFamily="2" charset="-78"/>
+                <a:ea typeface="Amiri" pitchFamily="2" charset="-78"/>
                 <a:cs typeface="Amiri" pitchFamily="2" charset="-78"/>
               </a:rPr>
               <a:t>عَفْوًا، هَلْ يُمْكِنُ أَنْ تُعِيدَ السُّؤَالَ؟</a:t>
@@ -17002,6 +17135,7 @@
                   <a:srgbClr val="D4AF37"/>
                 </a:solidFill>
                 <a:latin typeface="Amiri" pitchFamily="2" charset="-78"/>
+                <a:ea typeface="Amiri" pitchFamily="2" charset="-78"/>
                 <a:cs typeface="Amiri" pitchFamily="2" charset="-78"/>
               </a:rPr>
               <a:t>م</a:t>
@@ -17322,6 +17456,7 @@
                   <a:srgbClr val="8A6D1E"/>
                 </a:solidFill>
                 <a:latin typeface="Amiri" pitchFamily="2" charset="-78"/>
+                <a:ea typeface="Amiri" pitchFamily="2" charset="-78"/>
                 <a:cs typeface="Amiri" pitchFamily="2" charset="-78"/>
               </a:rPr>
               <a:t>التَّسَوُّقُ</a:t>
@@ -17602,6 +17737,7 @@
                   <a:srgbClr val="1B3B6F"/>
                 </a:solidFill>
                 <a:latin typeface="Amiri" pitchFamily="2" charset="-78"/>
+                <a:ea typeface="Amiri" pitchFamily="2" charset="-78"/>
                 <a:cs typeface="Amiri" pitchFamily="2" charset="-78"/>
               </a:rPr>
               <a:t>اشْتَرَيْتُ … بِسَبْعِينَ … وَكَانَ …</a:t>
@@ -17678,6 +17814,7 @@
                   <a:srgbClr val="1B3B6F"/>
                 </a:solidFill>
                 <a:latin typeface="Amiri" pitchFamily="2" charset="-78"/>
+                <a:ea typeface="Amiri" pitchFamily="2" charset="-78"/>
                 <a:cs typeface="Amiri" pitchFamily="2" charset="-78"/>
               </a:rPr>
               <a:t>صِفْ آخِرَ شَيْءٍ اشْتَرَيْتَهُ.</a:t>
@@ -17781,6 +17918,7 @@
                   <a:srgbClr val="1B3B6F"/>
                 </a:solidFill>
                 <a:latin typeface="Amiri" pitchFamily="2" charset="-78"/>
+                <a:ea typeface="Amiri" pitchFamily="2" charset="-78"/>
                 <a:cs typeface="Amiri" pitchFamily="2" charset="-78"/>
               </a:rPr>
               <a:t>أُفَضِّلُ … لِأَنَّ … أَمَّا …</a:t>
@@ -17857,6 +17995,7 @@
                   <a:srgbClr val="1B3B6F"/>
                 </a:solidFill>
                 <a:latin typeface="Amiri" pitchFamily="2" charset="-78"/>
+                <a:ea typeface="Amiri" pitchFamily="2" charset="-78"/>
                 <a:cs typeface="Amiri" pitchFamily="2" charset="-78"/>
               </a:rPr>
               <a:t>هَلْ تُفَضِّلُ التَّسَوُّقَ فِي المَحَلَّاتِ أَمْ عَلَى الإِنْتَرْنِتِ؟</a:t>
@@ -17960,6 +18099,7 @@
                   <a:srgbClr val="1B3B6F"/>
                 </a:solidFill>
                 <a:latin typeface="Amiri" pitchFamily="2" charset="-78"/>
+                <a:ea typeface="Amiri" pitchFamily="2" charset="-78"/>
                 <a:cs typeface="Amiri" pitchFamily="2" charset="-78"/>
               </a:rPr>
               <a:t>نَعَمْ / لَا، لِأَنَّ …</a:t>
@@ -18036,6 +18176,7 @@
                   <a:srgbClr val="1B3B6F"/>
                 </a:solidFill>
                 <a:latin typeface="Amiri" pitchFamily="2" charset="-78"/>
+                <a:ea typeface="Amiri" pitchFamily="2" charset="-78"/>
                 <a:cs typeface="Amiri" pitchFamily="2" charset="-78"/>
               </a:rPr>
               <a:t>هَلْ يَجِبُ أَنْ يَلْبَسَ الطُّلَّابُ زِيًّا مَدْرَسِيًّا؟</a:t>
@@ -18139,6 +18280,7 @@
                   <a:srgbClr val="1B3B6F"/>
                 </a:solidFill>
                 <a:latin typeface="Amiri" pitchFamily="2" charset="-78"/>
+                <a:ea typeface="Amiri" pitchFamily="2" charset="-78"/>
                 <a:cs typeface="Amiri" pitchFamily="2" charset="-78"/>
               </a:rPr>
               <a:t>أَلْبَسُ … مَعَ …</a:t>
@@ -18215,6 +18357,7 @@
                   <a:srgbClr val="1B3B6F"/>
                 </a:solidFill>
                 <a:latin typeface="Amiri" pitchFamily="2" charset="-78"/>
+                <a:ea typeface="Amiri" pitchFamily="2" charset="-78"/>
                 <a:cs typeface="Amiri" pitchFamily="2" charset="-78"/>
               </a:rPr>
               <a:t>مَاذَا تَلْبَسُ فِي حَفْلَةٍ؟</a:t>
@@ -18318,6 +18461,7 @@
                   <a:srgbClr val="1B3B6F"/>
                 </a:solidFill>
                 <a:latin typeface="Amiri" pitchFamily="2" charset="-78"/>
+                <a:ea typeface="Amiri" pitchFamily="2" charset="-78"/>
                 <a:cs typeface="Amiri" pitchFamily="2" charset="-78"/>
               </a:rPr>
               <a:t>سَأَشْتَرِي … لِأَنَّ …</a:t>
@@ -18394,6 +18538,7 @@
                   <a:srgbClr val="1B3B6F"/>
                 </a:solidFill>
                 <a:latin typeface="Amiri" pitchFamily="2" charset="-78"/>
+                <a:ea typeface="Amiri" pitchFamily="2" charset="-78"/>
                 <a:cs typeface="Amiri" pitchFamily="2" charset="-78"/>
               </a:rPr>
               <a:t>مَاذَا سَتَشْتَرِي لِلْعِيدِ القَادِمِ؟</a:t>
@@ -18603,6 +18748,7 @@
                   <a:srgbClr val="D4AF37"/>
                 </a:solidFill>
                 <a:latin typeface="Amiri" pitchFamily="2" charset="-78"/>
+                <a:ea typeface="Amiri" pitchFamily="2" charset="-78"/>
                 <a:cs typeface="Amiri" pitchFamily="2" charset="-78"/>
               </a:rPr>
               <a:t>م</a:t>
@@ -18923,6 +19069,7 @@
                   <a:srgbClr val="8A6D1E"/>
                 </a:solidFill>
                 <a:latin typeface="Amiri" pitchFamily="2" charset="-78"/>
+                <a:ea typeface="Amiri" pitchFamily="2" charset="-78"/>
                 <a:cs typeface="Amiri" pitchFamily="2" charset="-78"/>
               </a:rPr>
               <a:t>المُوضَةُ وَالمُجْتَمَعُ</a:t>
@@ -19203,6 +19350,7 @@
                   <a:srgbClr val="1B3B6F"/>
                 </a:solidFill>
                 <a:latin typeface="Amiri" pitchFamily="2" charset="-78"/>
+                <a:ea typeface="Amiri" pitchFamily="2" charset="-78"/>
                 <a:cs typeface="Amiri" pitchFamily="2" charset="-78"/>
               </a:rPr>
               <a:t>إِلَى حَدٍّ مَا، فَمَثَلًا …</a:t>
@@ -19279,6 +19427,7 @@
                   <a:srgbClr val="1B3B6F"/>
                 </a:solidFill>
                 <a:latin typeface="Amiri" pitchFamily="2" charset="-78"/>
+                <a:ea typeface="Amiri" pitchFamily="2" charset="-78"/>
                 <a:cs typeface="Amiri" pitchFamily="2" charset="-78"/>
               </a:rPr>
               <a:t>هَلْ تَعْكِسُ المَلَابِسُ شَخْصِيَّةَ الإِنْسَانِ؟</a:t>
@@ -19382,6 +19531,7 @@
                   <a:srgbClr val="1B3B6F"/>
                 </a:solidFill>
                 <a:latin typeface="Amiri" pitchFamily="2" charset="-78"/>
+                <a:ea typeface="Amiri" pitchFamily="2" charset="-78"/>
                 <a:cs typeface="Amiri" pitchFamily="2" charset="-78"/>
               </a:rPr>
               <a:t>كَانَتْ أُمِّي … أَمَّا اليَوْمَ فَنَشْتَرِي …</a:t>
@@ -19458,6 +19608,7 @@
                   <a:srgbClr val="1B3B6F"/>
                 </a:solidFill>
                 <a:latin typeface="Amiri" pitchFamily="2" charset="-78"/>
+                <a:ea typeface="Amiri" pitchFamily="2" charset="-78"/>
                 <a:cs typeface="Amiri" pitchFamily="2" charset="-78"/>
               </a:rPr>
               <a:t>كَيْفَ تَغَيَّرَتِ المُوضَةُ مُنْذُ أَيَّامِ وَالِدَيْكَ؟</a:t>
@@ -19561,6 +19712,7 @@
                   <a:srgbClr val="1B3B6F"/>
                 </a:solidFill>
                 <a:latin typeface="Amiri" pitchFamily="2" charset="-78"/>
+                <a:ea typeface="Amiri" pitchFamily="2" charset="-78"/>
                 <a:cs typeface="Amiri" pitchFamily="2" charset="-78"/>
               </a:rPr>
               <a:t>صَحِيحٌ أَنَّ … غَيْرَ أَنَّ …</a:t>
@@ -19637,6 +19789,7 @@
                   <a:srgbClr val="1B3B6F"/>
                 </a:solidFill>
                 <a:latin typeface="Amiri" pitchFamily="2" charset="-78"/>
+                <a:ea typeface="Amiri" pitchFamily="2" charset="-78"/>
                 <a:cs typeface="Amiri" pitchFamily="2" charset="-78"/>
               </a:rPr>
               <a:t>هَلِ المَلَابِسُ المُسْتَعْمَلَةُ فِكْرَةٌ جَيِّدَةٌ؟</a:t>
@@ -19740,6 +19893,7 @@
                   <a:srgbClr val="1B3B6F"/>
                 </a:solidFill>
                 <a:latin typeface="Amiri" pitchFamily="2" charset="-78"/>
+                <a:ea typeface="Amiri" pitchFamily="2" charset="-78"/>
                 <a:cs typeface="Amiri" pitchFamily="2" charset="-78"/>
               </a:rPr>
               <a:t>اشْتَرَيْتُ … عَلَى الإِنْتَرْنِتِ، فَلَمَّا وَصَلَ …</a:t>
@@ -19816,6 +19970,7 @@
                   <a:srgbClr val="1B3B6F"/>
                 </a:solidFill>
                 <a:latin typeface="Amiri" pitchFamily="2" charset="-78"/>
+                <a:ea typeface="Amiri" pitchFamily="2" charset="-78"/>
                 <a:cs typeface="Amiri" pitchFamily="2" charset="-78"/>
               </a:rPr>
               <a:t>صِفْ تَجْرِبَةَ تَسَوُّقٍ سَيِّئَةً.</a:t>
@@ -19919,6 +20074,7 @@
                   <a:srgbClr val="1B3B6F"/>
                 </a:solidFill>
                 <a:latin typeface="Amiri" pitchFamily="2" charset="-78"/>
+                <a:ea typeface="Amiri" pitchFamily="2" charset="-78"/>
                 <a:cs typeface="Amiri" pitchFamily="2" charset="-78"/>
               </a:rPr>
               <a:t>لَوْ أَعْطَوْنِي …، لَاشْتَرَيْتُ …</a:t>
@@ -19995,6 +20151,7 @@
                   <a:srgbClr val="1B3B6F"/>
                 </a:solidFill>
                 <a:latin typeface="Amiri" pitchFamily="2" charset="-78"/>
+                <a:ea typeface="Amiri" pitchFamily="2" charset="-78"/>
                 <a:cs typeface="Amiri" pitchFamily="2" charset="-78"/>
               </a:rPr>
               <a:t>لَوْ أَعْطَوْكَ مِئَةَ جُنَيْهٍ لِلتَّسَوُّقِ، كَيْفَ تُنْفِقُهَا؟</a:t>
@@ -20204,6 +20361,7 @@
                   <a:srgbClr val="D4AF37"/>
                 </a:solidFill>
                 <a:latin typeface="Amiri" pitchFamily="2" charset="-78"/>
+                <a:ea typeface="Amiri" pitchFamily="2" charset="-78"/>
                 <a:cs typeface="Amiri" pitchFamily="2" charset="-78"/>
               </a:rPr>
               <a:t>م</a:t>
@@ -20524,6 +20682,7 @@
                   <a:srgbClr val="8A6D1E"/>
                 </a:solidFill>
                 <a:latin typeface="Amiri" pitchFamily="2" charset="-78"/>
+                <a:ea typeface="Amiri" pitchFamily="2" charset="-78"/>
                 <a:cs typeface="Amiri" pitchFamily="2" charset="-78"/>
               </a:rPr>
               <a:t>آدَابُ الصَّفِّ</a:t>
@@ -22055,6 +22214,7 @@
                   <a:srgbClr val="D4AF37"/>
                 </a:solidFill>
                 <a:latin typeface="Amiri" pitchFamily="2" charset="-78"/>
+                <a:ea typeface="Amiri" pitchFamily="2" charset="-78"/>
                 <a:cs typeface="Amiri" pitchFamily="2" charset="-78"/>
               </a:rPr>
               <a:t>م</a:t>
@@ -22375,6 +22535,7 @@
                   <a:srgbClr val="8A6D1E"/>
                 </a:solidFill>
                 <a:latin typeface="Amiri" pitchFamily="2" charset="-78"/>
+                <a:ea typeface="Amiri" pitchFamily="2" charset="-78"/>
                 <a:cs typeface="Amiri" pitchFamily="2" charset="-78"/>
               </a:rPr>
               <a:t>نَمُوذَجُ الإِجَابَةِ</a:t>
@@ -22617,6 +22778,7 @@
                   <a:srgbClr val="1B3B6F"/>
                 </a:solidFill>
                 <a:latin typeface="Amiri" pitchFamily="2" charset="-78"/>
+                <a:ea typeface="Amiri" pitchFamily="2" charset="-78"/>
                 <a:cs typeface="Amiri" pitchFamily="2" charset="-78"/>
               </a:rPr>
               <a:t>أَلْبَسُ قَمِيصًا أَبْيَضَ وَبِنْطَالًا أَسْوَدَ.</a:t>
@@ -22693,6 +22855,7 @@
                   <a:srgbClr val="1B3B6F"/>
                 </a:solidFill>
                 <a:latin typeface="Amiri" pitchFamily="2" charset="-78"/>
+                <a:ea typeface="Amiri" pitchFamily="2" charset="-78"/>
                 <a:cs typeface="Amiri" pitchFamily="2" charset="-78"/>
               </a:rPr>
               <a:t>مَاذَا تَلْبَسُ الآنَ؟</a:t>
@@ -22796,6 +22959,7 @@
                   <a:srgbClr val="1B3B6F"/>
                 </a:solidFill>
                 <a:latin typeface="Amiri" pitchFamily="2" charset="-78"/>
+                <a:ea typeface="Amiri" pitchFamily="2" charset="-78"/>
                 <a:cs typeface="Amiri" pitchFamily="2" charset="-78"/>
               </a:rPr>
               <a:t>أُحِبُّ المَلَابِسَ الرِّيَاضِيَّةَ، لِأَنَّهَا مُرِيحَةٌ.</a:t>
@@ -22872,6 +23036,7 @@
                   <a:srgbClr val="1B3B6F"/>
                 </a:solidFill>
                 <a:latin typeface="Amiri" pitchFamily="2" charset="-78"/>
+                <a:ea typeface="Amiri" pitchFamily="2" charset="-78"/>
                 <a:cs typeface="Amiri" pitchFamily="2" charset="-78"/>
               </a:rPr>
               <a:t>مَا مَلَابِسُكَ المُفَضَّلَةُ؟</a:t>
@@ -22975,6 +23140,7 @@
                   <a:srgbClr val="1B3B6F"/>
                 </a:solidFill>
                 <a:latin typeface="Amiri" pitchFamily="2" charset="-78"/>
+                <a:ea typeface="Amiri" pitchFamily="2" charset="-78"/>
                 <a:cs typeface="Amiri" pitchFamily="2" charset="-78"/>
               </a:rPr>
               <a:t>أَشْتَرِيهَا مِنَ المَرْكَزِ التِّجَارِيِّ مَعَ أُمِّي.</a:t>
@@ -23051,6 +23217,7 @@
                   <a:srgbClr val="1B3B6F"/>
                 </a:solidFill>
                 <a:latin typeface="Amiri" pitchFamily="2" charset="-78"/>
+                <a:ea typeface="Amiri" pitchFamily="2" charset="-78"/>
                 <a:cs typeface="Amiri" pitchFamily="2" charset="-78"/>
               </a:rPr>
               <a:t>أَيْنَ تَشْتَرِي مَلَابِسَكَ؟</a:t>
@@ -23154,6 +23321,7 @@
                   <a:srgbClr val="1B3B6F"/>
                 </a:solidFill>
                 <a:latin typeface="Amiri" pitchFamily="2" charset="-78"/>
+                <a:ea typeface="Amiri" pitchFamily="2" charset="-78"/>
                 <a:cs typeface="Amiri" pitchFamily="2" charset="-78"/>
               </a:rPr>
               <a:t>لَا، لَا أُحِبُّهُ كَثِيرًا، لِأَنَّهُ مُتْعِبٌ.</a:t>
@@ -23230,6 +23398,7 @@
                   <a:srgbClr val="1B3B6F"/>
                 </a:solidFill>
                 <a:latin typeface="Amiri" pitchFamily="2" charset="-78"/>
+                <a:ea typeface="Amiri" pitchFamily="2" charset="-78"/>
                 <a:cs typeface="Amiri" pitchFamily="2" charset="-78"/>
               </a:rPr>
               <a:t>هَلْ تُحِبُّ التَّسَوُّقَ؟</a:t>
@@ -23333,6 +23502,7 @@
                   <a:srgbClr val="1B3B6F"/>
                 </a:solidFill>
                 <a:latin typeface="Amiri" pitchFamily="2" charset="-78"/>
+                <a:ea typeface="Amiri" pitchFamily="2" charset="-78"/>
                 <a:cs typeface="Amiri" pitchFamily="2" charset="-78"/>
               </a:rPr>
               <a:t>أَلْبَسُ ثَوْبًا جَدِيدًا أَبْيَضَ، وَحِذَاءً أَسْوَدَ.</a:t>
@@ -23409,6 +23579,7 @@
                   <a:srgbClr val="1B3B6F"/>
                 </a:solidFill>
                 <a:latin typeface="Amiri" pitchFamily="2" charset="-78"/>
+                <a:ea typeface="Amiri" pitchFamily="2" charset="-78"/>
                 <a:cs typeface="Amiri" pitchFamily="2" charset="-78"/>
               </a:rPr>
               <a:t>مَاذَا تَلْبَسُ فِي الأَعْيَادِ؟</a:t>
@@ -23618,6 +23789,7 @@
                   <a:srgbClr val="D4AF37"/>
                 </a:solidFill>
                 <a:latin typeface="Amiri" pitchFamily="2" charset="-78"/>
+                <a:ea typeface="Amiri" pitchFamily="2" charset="-78"/>
                 <a:cs typeface="Amiri" pitchFamily="2" charset="-78"/>
               </a:rPr>
               <a:t>م</a:t>
@@ -23938,6 +24110,7 @@
                   <a:srgbClr val="8A6D1E"/>
                 </a:solidFill>
                 <a:latin typeface="Amiri" pitchFamily="2" charset="-78"/>
+                <a:ea typeface="Amiri" pitchFamily="2" charset="-78"/>
                 <a:cs typeface="Amiri" pitchFamily="2" charset="-78"/>
               </a:rPr>
               <a:t>نَمُوذَجُ الإِجَابَةِ</a:t>
@@ -24180,6 +24353,7 @@
                   <a:srgbClr val="1B3B6F"/>
                 </a:solidFill>
                 <a:latin typeface="Amiri" pitchFamily="2" charset="-78"/>
+                <a:ea typeface="Amiri" pitchFamily="2" charset="-78"/>
                 <a:cs typeface="Amiri" pitchFamily="2" charset="-78"/>
               </a:rPr>
               <a:t>اشْتَرَيْتُ مِعْطَفًا رَمَادِيًّا بِسَبْعِينَ جُنَيْهًا، وَكَانَ أَرْخَصَ مِمَّا تَوَقَّعْتُ بِسَبَبِ التَّخْفِيضَاتِ.</a:t>
@@ -24256,6 +24430,7 @@
                   <a:srgbClr val="1B3B6F"/>
                 </a:solidFill>
                 <a:latin typeface="Amiri" pitchFamily="2" charset="-78"/>
+                <a:ea typeface="Amiri" pitchFamily="2" charset="-78"/>
                 <a:cs typeface="Amiri" pitchFamily="2" charset="-78"/>
               </a:rPr>
               <a:t>صِفْ آخِرَ شَيْءٍ اشْتَرَيْتَهُ.</a:t>
@@ -24359,6 +24534,7 @@
                   <a:srgbClr val="1B3B6F"/>
                 </a:solidFill>
                 <a:latin typeface="Amiri" pitchFamily="2" charset="-78"/>
+                <a:ea typeface="Amiri" pitchFamily="2" charset="-78"/>
                 <a:cs typeface="Amiri" pitchFamily="2" charset="-78"/>
               </a:rPr>
               <a:t>أُفَضِّلُ المَحَلَّاتِ، لِأَنِّي أُجَرِّبُ المَلَابِسَ قَبْلَ أَنْ أَشْتَرِيَهَا، أَمَّا الإِنْتَرْنِتُ فَأَسْرَعُ لٰكِنَّهُ مُخَاطَرَةٌ.</a:t>
@@ -24438,6 +24614,7 @@
                   <a:srgbClr val="1B3B6F"/>
                 </a:solidFill>
                 <a:latin typeface="Amiri" pitchFamily="2" charset="-78"/>
+                <a:ea typeface="Amiri" pitchFamily="2" charset="-78"/>
                 <a:cs typeface="Amiri" pitchFamily="2" charset="-78"/>
               </a:rPr>
               <a:t>هَلْ تُفَضِّلُ التَّسَوُّقَ فِي المَحَلَّاتِ أَمْ عَلَى الإِنْتَرْنِتِ؟</a:t>
@@ -24541,6 +24718,7 @@
                   <a:srgbClr val="1B3B6F"/>
                 </a:solidFill>
                 <a:latin typeface="Amiri" pitchFamily="2" charset="-78"/>
+                <a:ea typeface="Amiri" pitchFamily="2" charset="-78"/>
                 <a:cs typeface="Amiri" pitchFamily="2" charset="-78"/>
               </a:rPr>
               <a:t>نَعَمْ، لِأَنَّ الزِّيَّ يَجْعَلُ الجَمِيعَ مُتَسَاوِينَ، وَلَا يُفَكِّرُ أَحَدٌ فِي المُوضَةِ.</a:t>
@@ -24617,6 +24795,7 @@
                   <a:srgbClr val="1B3B6F"/>
                 </a:solidFill>
                 <a:latin typeface="Amiri" pitchFamily="2" charset="-78"/>
+                <a:ea typeface="Amiri" pitchFamily="2" charset="-78"/>
                 <a:cs typeface="Amiri" pitchFamily="2" charset="-78"/>
               </a:rPr>
               <a:t>هَلْ يَجِبُ أَنْ يَلْبَسَ الطُّلَّابُ زِيًّا مَدْرَسِيًّا؟</a:t>
@@ -24720,6 +24899,7 @@
                   <a:srgbClr val="1B3B6F"/>
                 </a:solidFill>
                 <a:latin typeface="Amiri" pitchFamily="2" charset="-78"/>
+                <a:ea typeface="Amiri" pitchFamily="2" charset="-78"/>
                 <a:cs typeface="Amiri" pitchFamily="2" charset="-78"/>
               </a:rPr>
               <a:t>أَلْبَسُ فُسْتَانًا طَوِيلًا أَخْضَرَ، مَعَ حِذَاءٍ ذَهَبِيٍّ وَحَقِيبَةٍ صَغِيرَةٍ.</a:t>
@@ -24796,6 +24976,7 @@
                   <a:srgbClr val="1B3B6F"/>
                 </a:solidFill>
                 <a:latin typeface="Amiri" pitchFamily="2" charset="-78"/>
+                <a:ea typeface="Amiri" pitchFamily="2" charset="-78"/>
                 <a:cs typeface="Amiri" pitchFamily="2" charset="-78"/>
               </a:rPr>
               <a:t>مَاذَا تَلْبَسُ فِي حَفْلَةٍ؟</a:t>
@@ -24899,6 +25080,7 @@
                   <a:srgbClr val="1B3B6F"/>
                 </a:solidFill>
                 <a:latin typeface="Amiri" pitchFamily="2" charset="-78"/>
+                <a:ea typeface="Amiri" pitchFamily="2" charset="-78"/>
                 <a:cs typeface="Amiri" pitchFamily="2" charset="-78"/>
               </a:rPr>
               <a:t>سَأَشْتَرِي حِذَاءً جَدِيدًا، لِأَنَّ حِذَائِيَ القَدِيمَ أَصْبَحَ ضَيِّقًا عَلَيَّ.</a:t>
@@ -24975,6 +25157,7 @@
                   <a:srgbClr val="1B3B6F"/>
                 </a:solidFill>
                 <a:latin typeface="Amiri" pitchFamily="2" charset="-78"/>
+                <a:ea typeface="Amiri" pitchFamily="2" charset="-78"/>
                 <a:cs typeface="Amiri" pitchFamily="2" charset="-78"/>
               </a:rPr>
               <a:t>مَاذَا سَتَشْتَرِي لِلْعِيدِ القَادِمِ؟</a:t>
@@ -25184,6 +25367,7 @@
                   <a:srgbClr val="D4AF37"/>
                 </a:solidFill>
                 <a:latin typeface="Amiri" pitchFamily="2" charset="-78"/>
+                <a:ea typeface="Amiri" pitchFamily="2" charset="-78"/>
                 <a:cs typeface="Amiri" pitchFamily="2" charset="-78"/>
               </a:rPr>
               <a:t>م</a:t>
@@ -25504,6 +25688,7 @@
                   <a:srgbClr val="8A6D1E"/>
                 </a:solidFill>
                 <a:latin typeface="Amiri" pitchFamily="2" charset="-78"/>
+                <a:ea typeface="Amiri" pitchFamily="2" charset="-78"/>
                 <a:cs typeface="Amiri" pitchFamily="2" charset="-78"/>
               </a:rPr>
               <a:t>نَمُوذَجُ الإِجَابَةِ</a:t>
@@ -25746,6 +25931,7 @@
                   <a:srgbClr val="1B3B6F"/>
                 </a:solidFill>
                 <a:latin typeface="Amiri" pitchFamily="2" charset="-78"/>
+                <a:ea typeface="Amiri" pitchFamily="2" charset="-78"/>
                 <a:cs typeface="Amiri" pitchFamily="2" charset="-78"/>
               </a:rPr>
               <a:t>إِلَى حَدٍّ مَا، فَمَثَلًا الشَّخْصُ الَّذِي يَلْبَسُ أَلْوَانًا زَاهِيَةً يَكُونُ غَالِبًا جَرِيئًا وَمَرِحًا.</a:t>
@@ -25822,6 +26008,7 @@
                   <a:srgbClr val="1B3B6F"/>
                 </a:solidFill>
                 <a:latin typeface="Amiri" pitchFamily="2" charset="-78"/>
+                <a:ea typeface="Amiri" pitchFamily="2" charset="-78"/>
                 <a:cs typeface="Amiri" pitchFamily="2" charset="-78"/>
               </a:rPr>
               <a:t>هَلْ تَعْكِسُ المَلَابِسُ شَخْصِيَّةَ الإِنْسَانِ؟</a:t>
@@ -25925,6 +26112,7 @@
                   <a:srgbClr val="1B3B6F"/>
                 </a:solidFill>
                 <a:latin typeface="Amiri" pitchFamily="2" charset="-78"/>
+                <a:ea typeface="Amiri" pitchFamily="2" charset="-78"/>
                 <a:cs typeface="Amiri" pitchFamily="2" charset="-78"/>
               </a:rPr>
               <a:t>كَانَتْ أُمِّي تَخِيطُ مَلَابِسَهَا بِنَفْسِهَا، أَمَّا اليَوْمَ فَنَشْتَرِي كُلَّ شَيْءٍ جَاهِزًا وَرَخِيصًا.</a:t>
@@ -26001,6 +26189,7 @@
                   <a:srgbClr val="1B3B6F"/>
                 </a:solidFill>
                 <a:latin typeface="Amiri" pitchFamily="2" charset="-78"/>
+                <a:ea typeface="Amiri" pitchFamily="2" charset="-78"/>
                 <a:cs typeface="Amiri" pitchFamily="2" charset="-78"/>
               </a:rPr>
               <a:t>كَيْفَ تَغَيَّرَتِ المُوضَةُ مُنْذُ أَيَّامِ وَالِدَيْكَ؟</a:t>
@@ -26104,6 +26293,7 @@
                   <a:srgbClr val="1B3B6F"/>
                 </a:solidFill>
                 <a:latin typeface="Amiri" pitchFamily="2" charset="-78"/>
+                <a:ea typeface="Amiri" pitchFamily="2" charset="-78"/>
                 <a:cs typeface="Amiri" pitchFamily="2" charset="-78"/>
               </a:rPr>
               <a:t>صَحِيحٌ أَنَّ بَعْضَ النَّاسِ يَخْجَلُونَ مِنْهَا، غَيْرَ أَنَّهَا تُوَفِّرُ المَالَ وَتَحْمِي البِيئَةَ مَعًا.</a:t>
@@ -26180,6 +26370,7 @@
                   <a:srgbClr val="1B3B6F"/>
                 </a:solidFill>
                 <a:latin typeface="Amiri" pitchFamily="2" charset="-78"/>
+                <a:ea typeface="Amiri" pitchFamily="2" charset="-78"/>
                 <a:cs typeface="Amiri" pitchFamily="2" charset="-78"/>
               </a:rPr>
               <a:t>هَلِ المَلَابِسُ المُسْتَعْمَلَةُ فِكْرَةٌ جَيِّدَةٌ؟</a:t>
@@ -26389,6 +26580,7 @@
                   <a:srgbClr val="D4AF37"/>
                 </a:solidFill>
                 <a:latin typeface="Amiri" pitchFamily="2" charset="-78"/>
+                <a:ea typeface="Amiri" pitchFamily="2" charset="-78"/>
                 <a:cs typeface="Amiri" pitchFamily="2" charset="-78"/>
               </a:rPr>
               <a:t>م</a:t>
@@ -26709,6 +26901,7 @@
                   <a:srgbClr val="8A6D1E"/>
                 </a:solidFill>
                 <a:latin typeface="Amiri" pitchFamily="2" charset="-78"/>
+                <a:ea typeface="Amiri" pitchFamily="2" charset="-78"/>
                 <a:cs typeface="Amiri" pitchFamily="2" charset="-78"/>
               </a:rPr>
               <a:t>نَمُوذَجُ الإِجَابَةِ</a:t>
@@ -26951,6 +27144,7 @@
                   <a:srgbClr val="1B3B6F"/>
                 </a:solidFill>
                 <a:latin typeface="Amiri" pitchFamily="2" charset="-78"/>
+                <a:ea typeface="Amiri" pitchFamily="2" charset="-78"/>
                 <a:cs typeface="Amiri" pitchFamily="2" charset="-78"/>
               </a:rPr>
               <a:t>اشْتَرَيْتُ حِذَاءً عَلَى الإِنْتَرْنِتِ، فَلَمَّا وَصَلَ وَجَدْتُهُ أَصْغَرَ بِمَقَاسَيْنِ، وَاسْتَغْرَقَ إِرْجَاعُهُ شَهْرًا كَامِلًا.</a:t>
@@ -27027,6 +27221,7 @@
                   <a:srgbClr val="1B3B6F"/>
                 </a:solidFill>
                 <a:latin typeface="Amiri" pitchFamily="2" charset="-78"/>
+                <a:ea typeface="Amiri" pitchFamily="2" charset="-78"/>
                 <a:cs typeface="Amiri" pitchFamily="2" charset="-78"/>
               </a:rPr>
               <a:t>صِفْ تَجْرِبَةَ تَسَوُّقٍ سَيِّئَةً.</a:t>
@@ -27130,6 +27325,7 @@
                   <a:srgbClr val="1B3B6F"/>
                 </a:solidFill>
                 <a:latin typeface="Amiri" pitchFamily="2" charset="-78"/>
+                <a:ea typeface="Amiri" pitchFamily="2" charset="-78"/>
                 <a:cs typeface="Amiri" pitchFamily="2" charset="-78"/>
               </a:rPr>
               <a:t>لَوْ أَعْطَوْنِي مِئَةَ جُنَيْهٍ، لَاشْتَرَيْتُ مِعْطَفًا جَيِّدًا وَاحِدًا بَدَلًا مِنْ خَمْسَةِ قُمْصَانٍ رَخِيصَةٍ.</a:t>
@@ -27206,6 +27402,7 @@
                   <a:srgbClr val="1B3B6F"/>
                 </a:solidFill>
                 <a:latin typeface="Amiri" pitchFamily="2" charset="-78"/>
+                <a:ea typeface="Amiri" pitchFamily="2" charset="-78"/>
                 <a:cs typeface="Amiri" pitchFamily="2" charset="-78"/>
               </a:rPr>
               <a:t>لَوْ أَعْطَوْكَ مِئَةَ جُنَيْهٍ لِلتَّسَوُّقِ، كَيْفَ تُنْفِقُهَا؟</a:t>
@@ -27415,6 +27612,7 @@
                   <a:srgbClr val="D4AF37"/>
                 </a:solidFill>
                 <a:latin typeface="Amiri" pitchFamily="2" charset="-78"/>
+                <a:ea typeface="Amiri" pitchFamily="2" charset="-78"/>
                 <a:cs typeface="Amiri" pitchFamily="2" charset="-78"/>
               </a:rPr>
               <a:t>م</a:t>
@@ -27735,6 +27933,7 @@
                   <a:srgbClr val="8A6D1E"/>
                 </a:solidFill>
                 <a:latin typeface="Amiri" pitchFamily="2" charset="-78"/>
+                <a:ea typeface="Amiri" pitchFamily="2" charset="-78"/>
                 <a:cs typeface="Amiri" pitchFamily="2" charset="-78"/>
               </a:rPr>
               <a:t>قَيِّمْ عَمَلَكَ</a:t>
@@ -28979,6 +29178,7 @@
                   <a:srgbClr val="FFFFFF"/>
                 </a:solidFill>
                 <a:latin typeface="Amiri" pitchFamily="2" charset="-78"/>
+                <a:ea typeface="Amiri" pitchFamily="2" charset="-78"/>
                 <a:cs typeface="Amiri" pitchFamily="2" charset="-78"/>
               </a:rPr>
               <a:t>أَحْسَنْتُمْ! إِلَى اللِّقَاءِ</a:t>
@@ -29131,6 +29331,7 @@
                   <a:srgbClr val="D4AF37"/>
                 </a:solidFill>
                 <a:latin typeface="Amiri" pitchFamily="2" charset="-78"/>
+                <a:ea typeface="Amiri" pitchFamily="2" charset="-78"/>
                 <a:cs typeface="Amiri" pitchFamily="2" charset="-78"/>
               </a:rPr>
               <a:t>وَرْشَةُ الكِتَابَةِ</a:t>
@@ -29264,6 +29465,7 @@
                   <a:srgbClr val="D4AF37"/>
                 </a:solidFill>
                 <a:latin typeface="Amiri" pitchFamily="2" charset="-78"/>
+                <a:ea typeface="Amiri" pitchFamily="2" charset="-78"/>
                 <a:cs typeface="Amiri" pitchFamily="2" charset="-78"/>
               </a:rPr>
               <a:t>م</a:t>
@@ -29584,6 +29786,7 @@
                   <a:srgbClr val="8A6D1E"/>
                 </a:solidFill>
                 <a:latin typeface="Amiri" pitchFamily="2" charset="-78"/>
+                <a:ea typeface="Amiri" pitchFamily="2" charset="-78"/>
                 <a:cs typeface="Amiri" pitchFamily="2" charset="-78"/>
               </a:rPr>
               <a:t>خَرِيطَةُ الوَرْشَةِ</a:t>
@@ -29898,6 +30101,7 @@
                   <a:srgbClr val="1B3B6F"/>
                 </a:solidFill>
                 <a:latin typeface="Amiri" pitchFamily="2" charset="-78"/>
+                <a:ea typeface="Amiri" pitchFamily="2" charset="-78"/>
                 <a:cs typeface="Amiri" pitchFamily="2" charset="-78"/>
               </a:rPr>
               <a:t>كَيْفَ</a:t>
@@ -30174,6 +30378,7 @@
                   <a:srgbClr val="1E6B52"/>
                 </a:solidFill>
                 <a:latin typeface="Amiri" pitchFamily="2" charset="-78"/>
+                <a:ea typeface="Amiri" pitchFamily="2" charset="-78"/>
                 <a:cs typeface="Amiri" pitchFamily="2" charset="-78"/>
               </a:rPr>
               <a:t>تَمْثِيلُ الدَّوْرِ</a:t>
@@ -30450,6 +30655,7 @@
                   <a:srgbClr val="8A6D1E"/>
                 </a:solidFill>
                 <a:latin typeface="Amiri" pitchFamily="2" charset="-78"/>
+                <a:ea typeface="Amiri" pitchFamily="2" charset="-78"/>
                 <a:cs typeface="Amiri" pitchFamily="2" charset="-78"/>
               </a:rPr>
               <a:t>النَّمُوذَجُ</a:t>
@@ -30726,6 +30932,7 @@
                   <a:srgbClr val="1E6B52"/>
                 </a:solidFill>
                 <a:latin typeface="Amiri" pitchFamily="2" charset="-78"/>
+                <a:ea typeface="Amiri" pitchFamily="2" charset="-78"/>
                 <a:cs typeface="Amiri" pitchFamily="2" charset="-78"/>
               </a:rPr>
               <a:t>المُحَادَثَةُ</a:t>
@@ -31002,6 +31209,7 @@
                   <a:srgbClr val="8A6D1E"/>
                 </a:solidFill>
                 <a:latin typeface="Amiri" pitchFamily="2" charset="-78"/>
+                <a:ea typeface="Amiri" pitchFamily="2" charset="-78"/>
                 <a:cs typeface="Amiri" pitchFamily="2" charset="-78"/>
               </a:rPr>
               <a:t>قَيِّمْ</a:t>
@@ -31245,6 +31453,7 @@
                   <a:srgbClr val="D4AF37"/>
                 </a:solidFill>
                 <a:latin typeface="Amiri" pitchFamily="2" charset="-78"/>
+                <a:ea typeface="Amiri" pitchFamily="2" charset="-78"/>
                 <a:cs typeface="Amiri" pitchFamily="2" charset="-78"/>
               </a:rPr>
               <a:t>م</a:t>
@@ -31565,6 +31774,7 @@
                   <a:srgbClr val="8A6D1E"/>
                 </a:solidFill>
                 <a:latin typeface="Amiri" pitchFamily="2" charset="-78"/>
+                <a:ea typeface="Amiri" pitchFamily="2" charset="-78"/>
                 <a:cs typeface="Amiri" pitchFamily="2" charset="-78"/>
               </a:rPr>
               <a:t>امْتِحَانُ التَّحَدُّثِ</a:t>
@@ -32189,6 +32399,7 @@
                   <a:srgbClr val="1B3B6F"/>
                 </a:solidFill>
                 <a:latin typeface="Amiri" pitchFamily="2" charset="-78"/>
+                <a:ea typeface="Amiri" pitchFamily="2" charset="-78"/>
                 <a:cs typeface="Amiri" pitchFamily="2" charset="-78"/>
               </a:rPr>
               <a:t>عَفْوًا، هَلْ يُمْكِنُ أَنْ تُعِيدَ السُّؤَالَ؟</a:t>
@@ -32288,6 +32499,7 @@
                   <a:srgbClr val="1B3B6F"/>
                 </a:solidFill>
                 <a:latin typeface="Amiri" pitchFamily="2" charset="-78"/>
+                <a:ea typeface="Amiri" pitchFamily="2" charset="-78"/>
                 <a:cs typeface="Amiri" pitchFamily="2" charset="-78"/>
               </a:rPr>
               <a:t>لَحْظَةً، دَعْنِي أُفَكِّرُ …</a:t>
@@ -32387,6 +32599,7 @@
                   <a:srgbClr val="1B3B6F"/>
                 </a:solidFill>
                 <a:latin typeface="Amiri" pitchFamily="2" charset="-78"/>
+                <a:ea typeface="Amiri" pitchFamily="2" charset="-78"/>
                 <a:cs typeface="Amiri" pitchFamily="2" charset="-78"/>
               </a:rPr>
               <a:t>أَقْصِدُ …</a:t>
@@ -32558,6 +32771,7 @@
                   <a:srgbClr val="D4AF37"/>
                 </a:solidFill>
                 <a:latin typeface="Amiri" pitchFamily="2" charset="-78"/>
+                <a:ea typeface="Amiri" pitchFamily="2" charset="-78"/>
                 <a:cs typeface="Amiri" pitchFamily="2" charset="-78"/>
               </a:rPr>
               <a:t>م</a:t>
@@ -32878,6 +33092,7 @@
                   <a:srgbClr val="8A6D1E"/>
                 </a:solidFill>
                 <a:latin typeface="Amiri" pitchFamily="2" charset="-78"/>
+                <a:ea typeface="Amiri" pitchFamily="2" charset="-78"/>
                 <a:cs typeface="Amiri" pitchFamily="2" charset="-78"/>
               </a:rPr>
               <a:t>مَاذَا تَلْبَسُ؟</a:t>
@@ -33181,6 +33396,7 @@
                   <a:srgbClr val="1B3B6F"/>
                 </a:solidFill>
                 <a:latin typeface="Amiri" pitchFamily="2" charset="-78"/>
+                <a:ea typeface="Amiri" pitchFamily="2" charset="-78"/>
                 <a:cs typeface="Amiri" pitchFamily="2" charset="-78"/>
               </a:rPr>
               <a:t>قَمِيصٌ · بِنْطَالٌ</a:t>
@@ -33338,6 +33554,7 @@
                   <a:srgbClr val="1B3B6F"/>
                 </a:solidFill>
                 <a:latin typeface="Amiri" pitchFamily="2" charset="-78"/>
+                <a:ea typeface="Amiri" pitchFamily="2" charset="-78"/>
                 <a:cs typeface="Amiri" pitchFamily="2" charset="-78"/>
               </a:rPr>
               <a:t>قُمْصَانٌ · بَنَاطِيلُ</a:t>
@@ -33603,6 +33820,7 @@
                   <a:srgbClr val="1B3B6F"/>
                 </a:solidFill>
                 <a:latin typeface="Amiri" pitchFamily="2" charset="-78"/>
+                <a:ea typeface="Amiri" pitchFamily="2" charset="-78"/>
                 <a:cs typeface="Amiri" pitchFamily="2" charset="-78"/>
               </a:rPr>
               <a:t>فُسْتَانٌ · تَنُّورَةٌ</a:t>
@@ -33760,6 +33978,7 @@
                   <a:srgbClr val="1B3B6F"/>
                 </a:solidFill>
                 <a:latin typeface="Amiri" pitchFamily="2" charset="-78"/>
+                <a:ea typeface="Amiri" pitchFamily="2" charset="-78"/>
                 <a:cs typeface="Amiri" pitchFamily="2" charset="-78"/>
               </a:rPr>
               <a:t>فَسَاتِينُ · تَنَانِيرُ</a:t>
@@ -34025,6 +34244,7 @@
                   <a:srgbClr val="1B3B6F"/>
                 </a:solidFill>
                 <a:latin typeface="Amiri" pitchFamily="2" charset="-78"/>
+                <a:ea typeface="Amiri" pitchFamily="2" charset="-78"/>
                 <a:cs typeface="Amiri" pitchFamily="2" charset="-78"/>
               </a:rPr>
               <a:t>حِذَاءٌ</a:t>
@@ -34182,6 +34402,7 @@
                   <a:srgbClr val="1B3B6F"/>
                 </a:solidFill>
                 <a:latin typeface="Amiri" pitchFamily="2" charset="-78"/>
+                <a:ea typeface="Amiri" pitchFamily="2" charset="-78"/>
                 <a:cs typeface="Amiri" pitchFamily="2" charset="-78"/>
               </a:rPr>
               <a:t>أَحْذِيَةٌ</a:t>
@@ -34285,6 +34506,7 @@
                   <a:srgbClr val="1B3B6F"/>
                 </a:solidFill>
                 <a:latin typeface="Amiri" pitchFamily="2" charset="-78"/>
+                <a:ea typeface="Amiri" pitchFamily="2" charset="-78"/>
                 <a:cs typeface="Amiri" pitchFamily="2" charset="-78"/>
               </a:rPr>
               <a:t>حِذَاءٌ</a:t>
@@ -34550,6 +34772,7 @@
                   <a:srgbClr val="1B3B6F"/>
                 </a:solidFill>
                 <a:latin typeface="Amiri" pitchFamily="2" charset="-78"/>
+                <a:ea typeface="Amiri" pitchFamily="2" charset="-78"/>
                 <a:cs typeface="Amiri" pitchFamily="2" charset="-78"/>
               </a:rPr>
               <a:t>مِعْطَفٌ · سُتْرَةٌ</a:t>
@@ -34707,6 +34930,7 @@
                   <a:srgbClr val="1B3B6F"/>
                 </a:solidFill>
                 <a:latin typeface="Amiri" pitchFamily="2" charset="-78"/>
+                <a:ea typeface="Amiri" pitchFamily="2" charset="-78"/>
                 <a:cs typeface="Amiri" pitchFamily="2" charset="-78"/>
               </a:rPr>
               <a:t>مَعَاطِفُ · سُتَرٌ</a:t>
@@ -34972,6 +35196,7 @@
                   <a:srgbClr val="1B3B6F"/>
                 </a:solidFill>
                 <a:latin typeface="Amiri" pitchFamily="2" charset="-78"/>
+                <a:ea typeface="Amiri" pitchFamily="2" charset="-78"/>
                 <a:cs typeface="Amiri" pitchFamily="2" charset="-78"/>
               </a:rPr>
               <a:t>قُبَّعَةٌ · نَظَّارَةٌ شَمْسِيَّةٌ</a:t>
@@ -35129,6 +35354,7 @@
                   <a:srgbClr val="1B3B6F"/>
                 </a:solidFill>
                 <a:latin typeface="Amiri" pitchFamily="2" charset="-78"/>
+                <a:ea typeface="Amiri" pitchFamily="2" charset="-78"/>
                 <a:cs typeface="Amiri" pitchFamily="2" charset="-78"/>
               </a:rPr>
               <a:t>قُبَّعَاتٌ</a:t>
@@ -35394,6 +35620,7 @@
                   <a:srgbClr val="1B3B6F"/>
                 </a:solidFill>
                 <a:latin typeface="Amiri" pitchFamily="2" charset="-78"/>
+                <a:ea typeface="Amiri" pitchFamily="2" charset="-78"/>
                 <a:cs typeface="Amiri" pitchFamily="2" charset="-78"/>
               </a:rPr>
               <a:t>مَقَاسٌ</a:t>
@@ -35551,6 +35778,7 @@
                   <a:srgbClr val="1B3B6F"/>
                 </a:solidFill>
                 <a:latin typeface="Amiri" pitchFamily="2" charset="-78"/>
+                <a:ea typeface="Amiri" pitchFamily="2" charset="-78"/>
                 <a:cs typeface="Amiri" pitchFamily="2" charset="-78"/>
               </a:rPr>
               <a:t>مَقَاسِي</a:t>
@@ -35654,6 +35882,7 @@
                   <a:srgbClr val="1B3B6F"/>
                 </a:solidFill>
                 <a:latin typeface="Amiri" pitchFamily="2" charset="-78"/>
+                <a:ea typeface="Amiri" pitchFamily="2" charset="-78"/>
                 <a:cs typeface="Amiri" pitchFamily="2" charset="-78"/>
               </a:rPr>
               <a:t>مَقَاسَاتٌ</a:t>
@@ -35757,6 +35986,7 @@
                   <a:srgbClr val="1B3B6F"/>
                 </a:solidFill>
                 <a:latin typeface="Amiri" pitchFamily="2" charset="-78"/>
+                <a:ea typeface="Amiri" pitchFamily="2" charset="-78"/>
                 <a:cs typeface="Amiri" pitchFamily="2" charset="-78"/>
               </a:rPr>
               <a:t>مَقَاسٌ</a:t>
@@ -35890,6 +36120,7 @@
                   <a:srgbClr val="D4AF37"/>
                 </a:solidFill>
                 <a:latin typeface="Amiri" pitchFamily="2" charset="-78"/>
+                <a:ea typeface="Amiri" pitchFamily="2" charset="-78"/>
                 <a:cs typeface="Amiri" pitchFamily="2" charset="-78"/>
               </a:rPr>
               <a:t>م</a:t>
@@ -36210,6 +36441,7 @@
                   <a:srgbClr val="8A6D1E"/>
                 </a:solidFill>
                 <a:latin typeface="Amiri" pitchFamily="2" charset="-78"/>
+                <a:ea typeface="Amiri" pitchFamily="2" charset="-78"/>
                 <a:cs typeface="Amiri" pitchFamily="2" charset="-78"/>
               </a:rPr>
               <a:t>هَلْ يُمْكِنُ أَنْ أُجَرِّبَهُ؟</a:t>
@@ -36513,6 +36745,7 @@
                   <a:srgbClr val="1B3B6F"/>
                 </a:solidFill>
                 <a:latin typeface="Amiri" pitchFamily="2" charset="-78"/>
+                <a:ea typeface="Amiri" pitchFamily="2" charset="-78"/>
                 <a:cs typeface="Amiri" pitchFamily="2" charset="-78"/>
               </a:rPr>
               <a:t>أُجَرِّبُهُ</a:t>
@@ -36670,6 +36903,7 @@
                   <a:srgbClr val="1B3B6F"/>
                 </a:solidFill>
                 <a:latin typeface="Amiri" pitchFamily="2" charset="-78"/>
+                <a:ea typeface="Amiri" pitchFamily="2" charset="-78"/>
                 <a:cs typeface="Amiri" pitchFamily="2" charset="-78"/>
               </a:rPr>
               <a:t>هَلْ يُمْكِنُ أَنْ أُجَرِّبَهُ؟</a:t>
@@ -36773,6 +37007,7 @@
                   <a:srgbClr val="1B3B6F"/>
                 </a:solidFill>
                 <a:latin typeface="Amiri" pitchFamily="2" charset="-78"/>
+                <a:ea typeface="Amiri" pitchFamily="2" charset="-78"/>
                 <a:cs typeface="Amiri" pitchFamily="2" charset="-78"/>
               </a:rPr>
               <a:t>أُجَرِّبُهَا</a:t>
@@ -37038,6 +37273,7 @@
                   <a:srgbClr val="1B3B6F"/>
                 </a:solidFill>
                 <a:latin typeface="Amiri" pitchFamily="2" charset="-78"/>
+                <a:ea typeface="Amiri" pitchFamily="2" charset="-78"/>
                 <a:cs typeface="Amiri" pitchFamily="2" charset="-78"/>
               </a:rPr>
               <a:t>هٰذَا · هٰذِهِ</a:t>
@@ -37195,6 +37431,7 @@
                   <a:srgbClr val="1B3B6F"/>
                 </a:solidFill>
                 <a:latin typeface="Amiri" pitchFamily="2" charset="-78"/>
+                <a:ea typeface="Amiri" pitchFamily="2" charset="-78"/>
                 <a:cs typeface="Amiri" pitchFamily="2" charset="-78"/>
               </a:rPr>
               <a:t>تِلْكَ</a:t>
@@ -37298,6 +37535,7 @@
                   <a:srgbClr val="1B3B6F"/>
                 </a:solidFill>
                 <a:latin typeface="Amiri" pitchFamily="2" charset="-78"/>
+                <a:ea typeface="Amiri" pitchFamily="2" charset="-78"/>
                 <a:cs typeface="Amiri" pitchFamily="2" charset="-78"/>
               </a:rPr>
               <a:t>ذٰلِكَ</a:t>
@@ -37563,6 +37801,7 @@
                   <a:srgbClr val="1B3B6F"/>
                 </a:solidFill>
                 <a:latin typeface="Amiri" pitchFamily="2" charset="-78"/>
+                <a:ea typeface="Amiri" pitchFamily="2" charset="-78"/>
                 <a:cs typeface="Amiri" pitchFamily="2" charset="-78"/>
               </a:rPr>
               <a:t>أَرْخَصُ مِنْ · أَغْلَى مِنْ</a:t>
@@ -37720,6 +37959,7 @@
                   <a:srgbClr val="1B3B6F"/>
                 </a:solidFill>
                 <a:latin typeface="Amiri" pitchFamily="2" charset="-78"/>
+                <a:ea typeface="Amiri" pitchFamily="2" charset="-78"/>
                 <a:cs typeface="Amiri" pitchFamily="2" charset="-78"/>
               </a:rPr>
               <a:t>أَصْغَرُ</a:t>
@@ -37823,6 +38063,7 @@
                   <a:srgbClr val="1B3B6F"/>
                 </a:solidFill>
                 <a:latin typeface="Amiri" pitchFamily="2" charset="-78"/>
+                <a:ea typeface="Amiri" pitchFamily="2" charset="-78"/>
                 <a:cs typeface="Amiri" pitchFamily="2" charset="-78"/>
               </a:rPr>
               <a:t>أَكْبَرُ</a:t>
@@ -38088,6 +38329,7 @@
                   <a:srgbClr val="1B3B6F"/>
                 </a:solidFill>
                 <a:latin typeface="Amiri" pitchFamily="2" charset="-78"/>
+                <a:ea typeface="Amiri" pitchFamily="2" charset="-78"/>
                 <a:cs typeface="Amiri" pitchFamily="2" charset="-78"/>
               </a:rPr>
               <a:t>بِكَمْ …؟</a:t>
@@ -38245,6 +38487,7 @@
                   <a:srgbClr val="1B3B6F"/>
                 </a:solidFill>
                 <a:latin typeface="Amiri" pitchFamily="2" charset="-78"/>
+                <a:ea typeface="Amiri" pitchFamily="2" charset="-78"/>
                 <a:cs typeface="Amiri" pitchFamily="2" charset="-78"/>
               </a:rPr>
               <a:t>بِكَمْ هٰذِهِ؟</a:t>
@@ -38348,6 +38591,7 @@
                   <a:srgbClr val="1B3B6F"/>
                 </a:solidFill>
                 <a:latin typeface="Amiri" pitchFamily="2" charset="-78"/>
+                <a:ea typeface="Amiri" pitchFamily="2" charset="-78"/>
                 <a:cs typeface="Amiri" pitchFamily="2" charset="-78"/>
               </a:rPr>
               <a:t>بِكَمْ هٰذَا؟</a:t>
@@ -38613,6 +38857,7 @@
                   <a:srgbClr val="1B3B6F"/>
                 </a:solidFill>
                 <a:latin typeface="Amiri" pitchFamily="2" charset="-78"/>
+                <a:ea typeface="Amiri" pitchFamily="2" charset="-78"/>
                 <a:cs typeface="Amiri" pitchFamily="2" charset="-78"/>
               </a:rPr>
               <a:t>ضَيِّقٌ · وَاسِعٌ</a:t>
@@ -38770,6 +39015,7 @@
                   <a:srgbClr val="1B3B6F"/>
                 </a:solidFill>
                 <a:latin typeface="Amiri" pitchFamily="2" charset="-78"/>
+                <a:ea typeface="Amiri" pitchFamily="2" charset="-78"/>
                 <a:cs typeface="Amiri" pitchFamily="2" charset="-78"/>
               </a:rPr>
               <a:t>ضَيِّقٌ جِدًّا عَلَيَّ</a:t>
@@ -38873,6 +39119,7 @@
                   <a:srgbClr val="1B3B6F"/>
                 </a:solidFill>
                 <a:latin typeface="Amiri" pitchFamily="2" charset="-78"/>
+                <a:ea typeface="Amiri" pitchFamily="2" charset="-78"/>
                 <a:cs typeface="Amiri" pitchFamily="2" charset="-78"/>
               </a:rPr>
               <a:t>ضَيِّقَةٌ · وَاسِعَةٌ</a:t>
@@ -39138,6 +39385,7 @@
                   <a:srgbClr val="1B3B6F"/>
                 </a:solidFill>
                 <a:latin typeface="Amiri" pitchFamily="2" charset="-78"/>
+                <a:ea typeface="Amiri" pitchFamily="2" charset="-78"/>
                 <a:cs typeface="Amiri" pitchFamily="2" charset="-78"/>
               </a:rPr>
               <a:t>أُرْجِعُ</a:t>
@@ -39295,6 +39543,7 @@
                   <a:srgbClr val="1B3B6F"/>
                 </a:solidFill>
                 <a:latin typeface="Amiri" pitchFamily="2" charset="-78"/>
+                <a:ea typeface="Amiri" pitchFamily="2" charset="-78"/>
                 <a:cs typeface="Amiri" pitchFamily="2" charset="-78"/>
               </a:rPr>
               <a:t>نُرْجِعُ</a:t>
@@ -39398,6 +39647,7 @@
                   <a:srgbClr val="1B3B6F"/>
                 </a:solidFill>
                 <a:latin typeface="Amiri" pitchFamily="2" charset="-78"/>
+                <a:ea typeface="Amiri" pitchFamily="2" charset="-78"/>
                 <a:cs typeface="Amiri" pitchFamily="2" charset="-78"/>
               </a:rPr>
               <a:t>يُرْجِعُ</a:t>
@@ -39501,6 +39751,7 @@
                   <a:srgbClr val="1B3B6F"/>
                 </a:solidFill>
                 <a:latin typeface="Amiri" pitchFamily="2" charset="-78"/>
+                <a:ea typeface="Amiri" pitchFamily="2" charset="-78"/>
                 <a:cs typeface="Amiri" pitchFamily="2" charset="-78"/>
               </a:rPr>
               <a:t>أَرْجَعْتُ</a:t>
@@ -39634,6 +39885,7 @@
                   <a:srgbClr val="D4AF37"/>
                 </a:solidFill>
                 <a:latin typeface="Amiri" pitchFamily="2" charset="-78"/>
+                <a:ea typeface="Amiri" pitchFamily="2" charset="-78"/>
                 <a:cs typeface="Amiri" pitchFamily="2" charset="-78"/>
               </a:rPr>
               <a:t>م</a:t>
@@ -39954,6 +40206,7 @@
                   <a:srgbClr val="8A6D1E"/>
                 </a:solidFill>
                 <a:latin typeface="Amiri" pitchFamily="2" charset="-78"/>
+                <a:ea typeface="Amiri" pitchFamily="2" charset="-78"/>
                 <a:cs typeface="Amiri" pitchFamily="2" charset="-78"/>
               </a:rPr>
               <a:t>فِي الغُرَفِ</a:t>
@@ -41130,6 +41383,7 @@
                   <a:srgbClr val="1B3B6F"/>
                 </a:solidFill>
                 <a:latin typeface="Amiri" pitchFamily="2" charset="-78"/>
+                <a:ea typeface="Amiri" pitchFamily="2" charset="-78"/>
                 <a:cs typeface="Amiri" pitchFamily="2" charset="-78"/>
               </a:rPr>
               <a:t>دَوْرُكَ!</a:t>
@@ -41206,6 +41460,7 @@
                   <a:srgbClr val="1B3B6F"/>
                 </a:solidFill>
                 <a:latin typeface="Amiri" pitchFamily="2" charset="-78"/>
+                <a:ea typeface="Amiri" pitchFamily="2" charset="-78"/>
                 <a:cs typeface="Amiri" pitchFamily="2" charset="-78"/>
               </a:rPr>
               <a:t>أَحْسَنْتَ! / أَحْسَنْتِ!</a:t>
@@ -41282,6 +41537,7 @@
                   <a:srgbClr val="1B3B6F"/>
                 </a:solidFill>
                 <a:latin typeface="Amiri" pitchFamily="2" charset="-78"/>
+                <a:ea typeface="Amiri" pitchFamily="2" charset="-78"/>
                 <a:cs typeface="Amiri" pitchFamily="2" charset="-78"/>
               </a:rPr>
               <a:t>تَكَلَّمْ أَكْثَرَ، مِنْ فَضْلِكَ</a:t>
@@ -41358,6 +41614,7 @@
                   <a:srgbClr val="1B3B6F"/>
                 </a:solidFill>
                 <a:latin typeface="Amiri" pitchFamily="2" charset="-78"/>
+                <a:ea typeface="Amiri" pitchFamily="2" charset="-78"/>
                 <a:cs typeface="Amiri" pitchFamily="2" charset="-78"/>
               </a:rPr>
               <a:t>لِمَاذَا؟</a:t>
@@ -41529,6 +41786,7 @@
                   <a:srgbClr val="D4AF37"/>
                 </a:solidFill>
                 <a:latin typeface="Amiri" pitchFamily="2" charset="-78"/>
+                <a:ea typeface="Amiri" pitchFamily="2" charset="-78"/>
                 <a:cs typeface="Amiri" pitchFamily="2" charset="-78"/>
               </a:rPr>
               <a:t>م</a:t>
@@ -41849,6 +42107,7 @@
                   <a:srgbClr val="8A6D1E"/>
                 </a:solidFill>
                 <a:latin typeface="Amiri" pitchFamily="2" charset="-78"/>
+                <a:ea typeface="Amiri" pitchFamily="2" charset="-78"/>
                 <a:cs typeface="Amiri" pitchFamily="2" charset="-78"/>
               </a:rPr>
               <a:t>أَشْتَرِي سُتْرَةً</a:t>
@@ -42129,6 +42388,7 @@
                   <a:srgbClr val="1B3B6F"/>
                 </a:solidFill>
                 <a:latin typeface="Amiri" pitchFamily="2" charset="-78"/>
+                <a:ea typeface="Amiri" pitchFamily="2" charset="-78"/>
                 <a:cs typeface="Amiri" pitchFamily="2" charset="-78"/>
               </a:rPr>
               <a:t>أَبْحَثُ عَنْ …</a:t>
@@ -42205,6 +42465,7 @@
                   <a:srgbClr val="1B3B6F"/>
                 </a:solidFill>
                 <a:latin typeface="Amiri" pitchFamily="2" charset="-78"/>
+                <a:ea typeface="Amiri" pitchFamily="2" charset="-78"/>
                 <a:cs typeface="Amiri" pitchFamily="2" charset="-78"/>
               </a:rPr>
               <a:t>أَهْلًا، كَيْفَ أُسَاعِدُكَ؟</a:t>
@@ -42373,6 +42634,7 @@
                   <a:srgbClr val="1B3B6F"/>
                 </a:solidFill>
                 <a:latin typeface="Amiri" pitchFamily="2" charset="-78"/>
+                <a:ea typeface="Amiri" pitchFamily="2" charset="-78"/>
                 <a:cs typeface="Amiri" pitchFamily="2" charset="-78"/>
               </a:rPr>
               <a:t>أُرِيدُ سُتْرَةً …</a:t>
@@ -42449,6 +42711,7 @@
                   <a:srgbClr val="1B3B6F"/>
                 </a:solidFill>
                 <a:latin typeface="Amiri" pitchFamily="2" charset="-78"/>
+                <a:ea typeface="Amiri" pitchFamily="2" charset="-78"/>
                 <a:cs typeface="Amiri" pitchFamily="2" charset="-78"/>
               </a:rPr>
               <a:t>أَيَّ لَوْنٍ تُرِيدُ؟</a:t>
@@ -42617,6 +42880,7 @@
                   <a:srgbClr val="1B3B6F"/>
                 </a:solidFill>
                 <a:latin typeface="Amiri" pitchFamily="2" charset="-78"/>
+                <a:ea typeface="Amiri" pitchFamily="2" charset="-78"/>
                 <a:cs typeface="Amiri" pitchFamily="2" charset="-78"/>
               </a:rPr>
               <a:t>مَقَاسِي …</a:t>
@@ -42693,6 +42957,7 @@
                   <a:srgbClr val="1B3B6F"/>
                 </a:solidFill>
                 <a:latin typeface="Amiri" pitchFamily="2" charset="-78"/>
+                <a:ea typeface="Amiri" pitchFamily="2" charset="-78"/>
                 <a:cs typeface="Amiri" pitchFamily="2" charset="-78"/>
               </a:rPr>
               <a:t>مَا مَقَاسُكَ؟</a:t>
@@ -42861,6 +43126,7 @@
                   <a:srgbClr val="1B3B6F"/>
                 </a:solidFill>
                 <a:latin typeface="Amiri" pitchFamily="2" charset="-78"/>
+                <a:ea typeface="Amiri" pitchFamily="2" charset="-78"/>
                 <a:cs typeface="Amiri" pitchFamily="2" charset="-78"/>
               </a:rPr>
               <a:t>هَلْ يُمْكِنُ أَنْ أُجَرِّبَهَا؟ بِكَمْ …؟</a:t>
@@ -42937,6 +43203,7 @@
                   <a:srgbClr val="1B3B6F"/>
                 </a:solidFill>
                 <a:latin typeface="Amiri" pitchFamily="2" charset="-78"/>
+                <a:ea typeface="Amiri" pitchFamily="2" charset="-78"/>
                 <a:cs typeface="Amiri" pitchFamily="2" charset="-78"/>
               </a:rPr>
               <a:t>تَفَضَّلْ، هٰذِهِ السُّتْرَةُ الزَّرْقَاءُ.</a:t>
@@ -43105,6 +43372,7 @@
                   <a:srgbClr val="1B3B6F"/>
                 </a:solidFill>
                 <a:latin typeface="Amiri" pitchFamily="2" charset="-78"/>
+                <a:ea typeface="Amiri" pitchFamily="2" charset="-78"/>
                 <a:cs typeface="Amiri" pitchFamily="2" charset="-78"/>
               </a:rPr>
               <a:t>بِالبِطَاقَةِ / نَقْدًا</a:t>
@@ -43181,6 +43449,7 @@
                   <a:srgbClr val="1B3B6F"/>
                 </a:solidFill>
                 <a:latin typeface="Amiri" pitchFamily="2" charset="-78"/>
+                <a:ea typeface="Amiri" pitchFamily="2" charset="-78"/>
                 <a:cs typeface="Amiri" pitchFamily="2" charset="-78"/>
               </a:rPr>
               <a:t>كَيْفَ تَدْفَعُ؟</a:t>
@@ -43455,6 +43724,7 @@
                   <a:srgbClr val="D4AF37"/>
                 </a:solidFill>
                 <a:latin typeface="Amiri" pitchFamily="2" charset="-78"/>
+                <a:ea typeface="Amiri" pitchFamily="2" charset="-78"/>
                 <a:cs typeface="Amiri" pitchFamily="2" charset="-78"/>
               </a:rPr>
               <a:t>م</a:t>
@@ -43775,6 +44045,7 @@
                   <a:srgbClr val="8A6D1E"/>
                 </a:solidFill>
                 <a:latin typeface="Amiri" pitchFamily="2" charset="-78"/>
+                <a:ea typeface="Amiri" pitchFamily="2" charset="-78"/>
                 <a:cs typeface="Amiri" pitchFamily="2" charset="-78"/>
               </a:rPr>
               <a:t>أَيُّ حِذَاءٍ رِيَاضِيٍّ؟</a:t>
@@ -44055,6 +44326,7 @@
                   <a:srgbClr val="1B3B6F"/>
                 </a:solidFill>
                 <a:latin typeface="Amiri" pitchFamily="2" charset="-78"/>
+                <a:ea typeface="Amiri" pitchFamily="2" charset="-78"/>
                 <a:cs typeface="Amiri" pitchFamily="2" charset="-78"/>
               </a:rPr>
               <a:t>بِكَمْ هٰذَا؟ وَبِكَمْ ذٰلِكَ؟</a:t>
@@ -44131,6 +44403,7 @@
                   <a:srgbClr val="1B3B6F"/>
                 </a:solidFill>
                 <a:latin typeface="Amiri" pitchFamily="2" charset="-78"/>
+                <a:ea typeface="Amiri" pitchFamily="2" charset="-78"/>
                 <a:cs typeface="Amiri" pitchFamily="2" charset="-78"/>
               </a:rPr>
               <a:t>عِنْدَنَا هٰذَا الحِذَاءُ الأَبْيَضُ، وَذٰلِكَ الحِذَاءُ الأَحْمَرُ.</a:t>
@@ -44299,6 +44572,7 @@
                   <a:srgbClr val="1B3B6F"/>
                 </a:solidFill>
                 <a:latin typeface="Amiri" pitchFamily="2" charset="-78"/>
+                <a:ea typeface="Amiri" pitchFamily="2" charset="-78"/>
                 <a:cs typeface="Amiri" pitchFamily="2" charset="-78"/>
               </a:rPr>
               <a:t>الأَحْمَرُ أَرْخَصُ مِنْ …</a:t>
@@ -44375,6 +44649,7 @@
                   <a:srgbClr val="1B3B6F"/>
                 </a:solidFill>
                 <a:latin typeface="Amiri" pitchFamily="2" charset="-78"/>
+                <a:ea typeface="Amiri" pitchFamily="2" charset="-78"/>
                 <a:cs typeface="Amiri" pitchFamily="2" charset="-78"/>
               </a:rPr>
               <a:t>الأَبْيَضُ بِسِتِّينَ، وَالأَحْمَرُ بِخَمْسَةٍ وَأَرْبَعِينَ.</a:t>
@@ -44543,6 +44818,7 @@
                   <a:srgbClr val="1B3B6F"/>
                 </a:solidFill>
                 <a:latin typeface="Amiri" pitchFamily="2" charset="-78"/>
+                <a:ea typeface="Amiri" pitchFamily="2" charset="-78"/>
                 <a:cs typeface="Amiri" pitchFamily="2" charset="-78"/>
               </a:rPr>
               <a:t>أَيُّهُمَا أَفْضَلُ لِلْجَرْيِ؟</a:t>
@@ -44619,6 +44895,7 @@
                   <a:srgbClr val="1B3B6F"/>
                 </a:solidFill>
                 <a:latin typeface="Amiri" pitchFamily="2" charset="-78"/>
+                <a:ea typeface="Amiri" pitchFamily="2" charset="-78"/>
                 <a:cs typeface="Amiri" pitchFamily="2" charset="-78"/>
               </a:rPr>
               <a:t>لٰكِنَّ الأَبْيَضَ أَخَفُّ وَأَقْوَى.</a:t>
@@ -44722,6 +44999,7 @@
                   <a:srgbClr val="1B3B6F"/>
                 </a:solidFill>
                 <a:latin typeface="Amiri" pitchFamily="2" charset="-78"/>
+                <a:ea typeface="Amiri" pitchFamily="2" charset="-78"/>
                 <a:cs typeface="Amiri" pitchFamily="2" charset="-78"/>
               </a:rPr>
               <a:t>إِذَنْ سَآخُذُ … لِأَنَّ …</a:t>
@@ -44798,6 +45076,7 @@
                   <a:srgbClr val="1B3B6F"/>
                 </a:solidFill>
                 <a:latin typeface="Amiri" pitchFamily="2" charset="-78"/>
+                <a:ea typeface="Amiri" pitchFamily="2" charset="-78"/>
                 <a:cs typeface="Amiri" pitchFamily="2" charset="-78"/>
               </a:rPr>
               <a:t>الأَبْيَضُ بِالتَّأْكِيدِ.</a:t>
@@ -44901,6 +45180,7 @@
                   <a:srgbClr val="1B3B6F"/>
                 </a:solidFill>
                 <a:latin typeface="Amiri" pitchFamily="2" charset="-78"/>
+                <a:ea typeface="Amiri" pitchFamily="2" charset="-78"/>
                 <a:cs typeface="Amiri" pitchFamily="2" charset="-78"/>
               </a:rPr>
               <a:t>نَعَمْ، … / لَا، شُكْرًا، عِنْدِي …</a:t>
@@ -44977,6 +45257,7 @@
                   <a:srgbClr val="1B3B6F"/>
                 </a:solidFill>
                 <a:latin typeface="Amiri" pitchFamily="2" charset="-78"/>
+                <a:ea typeface="Amiri" pitchFamily="2" charset="-78"/>
                 <a:cs typeface="Amiri" pitchFamily="2" charset="-78"/>
               </a:rPr>
               <a:t>هَلْ تُرِيدُ جَوَارِبَ أَيْضًا؟</a:t>
@@ -45151,13 +45432,9 @@
     <a:fontScheme name="Office">
       <a:majorFont>
         <a:latin typeface="Calibri Light" panose="020F0302020204030204"/>
-        <a:ea typeface=""/>
-        <a:cs typeface=""/>
-        <a:font script="Jpan" typeface="游ゴシック Light"/>
-        <a:font script="Hang" typeface="맑은 고딕"/>
-        <a:font script="Hans" typeface="等线 Light"/>
-        <a:font script="Hant" typeface="新細明體"/>
-        <a:font script="Arab" typeface="Times New Roman"/>
+        <a:ea typeface="Amiri" pitchFamily="2" charset="-78"/>
+        <a:cs typeface="Amiri" pitchFamily="2" charset="-78"/>
+        <a:font script="Arab" typeface="Amiri"/>
         <a:font script="Hebr" typeface="Times New Roman"/>
         <a:font script="Thai" typeface="Angsana New"/>
         <a:font script="Ethi" typeface="Nyala"/>
@@ -45203,13 +45480,9 @@
       </a:majorFont>
       <a:minorFont>
         <a:latin typeface="Calibri" panose="020F0502020204030204"/>
-        <a:ea typeface=""/>
-        <a:cs typeface=""/>
-        <a:font script="Jpan" typeface="游ゴシック"/>
-        <a:font script="Hang" typeface="맑은 고딕"/>
-        <a:font script="Hans" typeface="等线"/>
-        <a:font script="Hant" typeface="新細明體"/>
-        <a:font script="Arab" typeface="Arial"/>
+        <a:ea typeface="Amiri" pitchFamily="2" charset="-78"/>
+        <a:cs typeface="Amiri" pitchFamily="2" charset="-78"/>
+        <a:font script="Arab" typeface="Amiri"/>
         <a:font script="Hebr" typeface="Arial"/>
         <a:font script="Thai" typeface="Cordia New"/>
         <a:font script="Ethi" typeface="Nyala"/>
